--- a/doc/ScoreCaddie_테스트계획서.pptx
+++ b/doc/ScoreCaddie_테스트계획서.pptx
@@ -2104,7 +2104,7 @@
                 <a:gridCol w="1554480"/>
                 <a:gridCol w="1645920"/>
               </a:tblGrid>
-              <a:tr h="746760">
+              <a:tr h="560070">
                 <a:tc>
                   <a:txBody>
                     <a:bodyPr/>
@@ -2291,7 +2291,7 @@
                   </a:tcPr>
                 </a:tc>
               </a:tr>
-              <a:tr h="746760">
+              <a:tr h="560070">
                 <a:tc>
                   <a:txBody>
                     <a:bodyPr/>
@@ -2343,7 +2343,44 @@
                             <a:srgbClr val="17282A"/>
                           </a:solidFill>
                         </a:rPr>
-                        <a:t>parseCsv</a:t>
+                        <a:t>parseCsv / findColumnIndex</a:t>
+                      </a:r>
+                      <a:endParaRPr lang="en-US" sz="1100" dirty="0"/>
+                    </a:p>
+                  </a:txBody>
+                  <a:tcPr marL="101600" marR="101600" marT="50800" marB="50800" anchor="ctr">
+                    <a:lnL w="0" cap="flat" cmpd="sng" algn="ctr">
+                      <a:noFill/>
+                    </a:lnL>
+                    <a:lnR w="0" cap="flat" cmpd="sng" algn="ctr">
+                      <a:noFill/>
+                    </a:lnR>
+                    <a:lnT w="0" cap="flat" cmpd="sng" algn="ctr">
+                      <a:noFill/>
+                    </a:lnT>
+                    <a:lnB w="0" cap="flat" cmpd="sng" algn="ctr">
+                      <a:noFill/>
+                    </a:lnB>
+                    <a:solidFill>
+                      <a:srgbClr val="FFFFFF"/>
+                    </a:solidFill>
+                  </a:tcPr>
+                </a:tc>
+                <a:tc>
+                  <a:txBody>
+                    <a:bodyPr/>
+                    <a:lstStyle/>
+                    <a:p>
+                      <a:pPr indent="0" marL="0">
+                        <a:buNone/>
+                      </a:pPr>
+                      <a:r>
+                        <a:rPr lang="en-US" sz="1100" b="1" dirty="0">
+                          <a:solidFill>
+                            <a:srgbClr val="0B8457"/>
+                          </a:solidFill>
+                        </a:rPr>
+                        <a:t>통과</a:t>
                       </a:r>
                       <a:endParaRPr lang="en-US" sz="1100" dirty="0"/>
                     </a:p>
@@ -2380,7 +2417,7 @@
                             <a:srgbClr val="17282A"/>
                           </a:solidFill>
                         </a:rPr>
-                        <a:t>예정</a:t>
+                        <a:t>2026-07-28</a:t>
                       </a:r>
                       <a:endParaRPr lang="en-US" sz="1100" dirty="0"/>
                     </a:p>
@@ -2417,44 +2454,7 @@
                             <a:srgbClr val="17282A"/>
                           </a:solidFill>
                         </a:rPr>
-                        <a:t>-</a:t>
-                      </a:r>
-                      <a:endParaRPr lang="en-US" sz="1100" dirty="0"/>
-                    </a:p>
-                  </a:txBody>
-                  <a:tcPr marL="101600" marR="101600" marT="50800" marB="50800" anchor="ctr">
-                    <a:lnL w="0" cap="flat" cmpd="sng" algn="ctr">
-                      <a:noFill/>
-                    </a:lnL>
-                    <a:lnR w="0" cap="flat" cmpd="sng" algn="ctr">
-                      <a:noFill/>
-                    </a:lnR>
-                    <a:lnT w="0" cap="flat" cmpd="sng" algn="ctr">
-                      <a:noFill/>
-                    </a:lnT>
-                    <a:lnB w="0" cap="flat" cmpd="sng" algn="ctr">
-                      <a:noFill/>
-                    </a:lnB>
-                    <a:solidFill>
-                      <a:srgbClr val="FFFFFF"/>
-                    </a:solidFill>
-                  </a:tcPr>
-                </a:tc>
-                <a:tc>
-                  <a:txBody>
-                    <a:bodyPr/>
-                    <a:lstStyle/>
-                    <a:p>
-                      <a:pPr indent="0" marL="0">
-                        <a:buNone/>
-                      </a:pPr>
-                      <a:r>
-                        <a:rPr lang="en-US" sz="1100" dirty="0">
-                          <a:solidFill>
-                            <a:srgbClr val="17282A"/>
-                          </a:solidFill>
-                        </a:rPr>
-                        <a:t>따옴표·콤마 포함 케이스</a:t>
+                        <a:t>8개 케이스(따옴표·콤마·BOM 등)</a:t>
                       </a:r>
                       <a:endParaRPr lang="en-US" sz="1100" dirty="0"/>
                     </a:p>
@@ -2478,7 +2478,7 @@
                   </a:tcPr>
                 </a:tc>
               </a:tr>
-              <a:tr h="746760">
+              <a:tr h="560070">
                 <a:tc>
                   <a:txBody>
                     <a:bodyPr/>
@@ -2562,9 +2562,757 @@
                         <a:buNone/>
                       </a:pPr>
                       <a:r>
+                        <a:rPr lang="en-US" sz="1100" b="1" dirty="0">
+                          <a:solidFill>
+                            <a:srgbClr val="0B8457"/>
+                          </a:solidFill>
+                        </a:rPr>
+                        <a:t>통과</a:t>
+                      </a:r>
+                      <a:endParaRPr lang="en-US" sz="1100" dirty="0"/>
+                    </a:p>
+                  </a:txBody>
+                  <a:tcPr marL="101600" marR="101600" marT="50800" marB="50800" anchor="ctr">
+                    <a:lnL w="0" cap="flat" cmpd="sng" algn="ctr">
+                      <a:noFill/>
+                    </a:lnL>
+                    <a:lnR w="0" cap="flat" cmpd="sng" algn="ctr">
+                      <a:noFill/>
+                    </a:lnR>
+                    <a:lnT w="0" cap="flat" cmpd="sng" algn="ctr">
+                      <a:noFill/>
+                    </a:lnT>
+                    <a:lnB w="0" cap="flat" cmpd="sng" algn="ctr">
+                      <a:noFill/>
+                    </a:lnB>
+                    <a:solidFill>
+                      <a:srgbClr val="F2F7F7"/>
+                    </a:solidFill>
+                  </a:tcPr>
+                </a:tc>
+                <a:tc>
+                  <a:txBody>
+                    <a:bodyPr/>
+                    <a:lstStyle/>
+                    <a:p>
+                      <a:pPr indent="0" marL="0">
+                        <a:buNone/>
+                      </a:pPr>
+                      <a:r>
                         <a:rPr lang="en-US" sz="1100" dirty="0">
                           <a:solidFill>
                             <a:srgbClr val="17282A"/>
+                          </a:solidFill>
+                        </a:rPr>
+                        <a:t>2026-07-28</a:t>
+                      </a:r>
+                      <a:endParaRPr lang="en-US" sz="1100" dirty="0"/>
+                    </a:p>
+                  </a:txBody>
+                  <a:tcPr marL="101600" marR="101600" marT="50800" marB="50800" anchor="ctr">
+                    <a:lnL w="0" cap="flat" cmpd="sng" algn="ctr">
+                      <a:noFill/>
+                    </a:lnL>
+                    <a:lnR w="0" cap="flat" cmpd="sng" algn="ctr">
+                      <a:noFill/>
+                    </a:lnR>
+                    <a:lnT w="0" cap="flat" cmpd="sng" algn="ctr">
+                      <a:noFill/>
+                    </a:lnT>
+                    <a:lnB w="0" cap="flat" cmpd="sng" algn="ctr">
+                      <a:noFill/>
+                    </a:lnB>
+                    <a:solidFill>
+                      <a:srgbClr val="F2F7F7"/>
+                    </a:solidFill>
+                  </a:tcPr>
+                </a:tc>
+                <a:tc>
+                  <a:txBody>
+                    <a:bodyPr/>
+                    <a:lstStyle/>
+                    <a:p>
+                      <a:pPr indent="0" marL="0">
+                        <a:buNone/>
+                      </a:pPr>
+                      <a:r>
+                        <a:rPr lang="en-US" sz="1100" dirty="0">
+                          <a:solidFill>
+                            <a:srgbClr val="17282A"/>
+                          </a:solidFill>
+                        </a:rPr>
+                        <a:t>4개 케이스(범위 이상치 포함)</a:t>
+                      </a:r>
+                      <a:endParaRPr lang="en-US" sz="1100" dirty="0"/>
+                    </a:p>
+                  </a:txBody>
+                  <a:tcPr marL="101600" marR="101600" marT="50800" marB="50800" anchor="ctr">
+                    <a:lnL w="0" cap="flat" cmpd="sng" algn="ctr">
+                      <a:noFill/>
+                    </a:lnL>
+                    <a:lnR w="0" cap="flat" cmpd="sng" algn="ctr">
+                      <a:noFill/>
+                    </a:lnR>
+                    <a:lnT w="0" cap="flat" cmpd="sng" algn="ctr">
+                      <a:noFill/>
+                    </a:lnT>
+                    <a:lnB w="0" cap="flat" cmpd="sng" algn="ctr">
+                      <a:noFill/>
+                    </a:lnB>
+                    <a:solidFill>
+                      <a:srgbClr val="F2F7F7"/>
+                    </a:solidFill>
+                  </a:tcPr>
+                </a:tc>
+              </a:tr>
+              <a:tr h="560070">
+                <a:tc>
+                  <a:txBody>
+                    <a:bodyPr/>
+                    <a:lstStyle/>
+                    <a:p>
+                      <a:pPr indent="0" marL="0">
+                        <a:buNone/>
+                      </a:pPr>
+                      <a:r>
+                        <a:rPr lang="en-US" sz="1100" dirty="0">
+                          <a:solidFill>
+                            <a:srgbClr val="17282A"/>
+                          </a:solidFill>
+                        </a:rPr>
+                        <a:t>lib/weather/kma.test.ts</a:t>
+                      </a:r>
+                      <a:endParaRPr lang="en-US" sz="1100" dirty="0"/>
+                    </a:p>
+                  </a:txBody>
+                  <a:tcPr marL="101600" marR="101600" marT="50800" marB="50800" anchor="ctr">
+                    <a:lnL w="0" cap="flat" cmpd="sng" algn="ctr">
+                      <a:noFill/>
+                    </a:lnL>
+                    <a:lnR w="0" cap="flat" cmpd="sng" algn="ctr">
+                      <a:noFill/>
+                    </a:lnR>
+                    <a:lnT w="0" cap="flat" cmpd="sng" algn="ctr">
+                      <a:noFill/>
+                    </a:lnT>
+                    <a:lnB w="0" cap="flat" cmpd="sng" algn="ctr">
+                      <a:noFill/>
+                    </a:lnB>
+                    <a:solidFill>
+                      <a:srgbClr val="FFFFFF"/>
+                    </a:solidFill>
+                  </a:tcPr>
+                </a:tc>
+                <a:tc>
+                  <a:txBody>
+                    <a:bodyPr/>
+                    <a:lstStyle/>
+                    <a:p>
+                      <a:pPr indent="0" marL="0">
+                        <a:buNone/>
+                      </a:pPr>
+                      <a:r>
+                        <a:rPr lang="en-US" sz="1100" dirty="0">
+                          <a:solidFill>
+                            <a:srgbClr val="17282A"/>
+                          </a:solidFill>
+                        </a:rPr>
+                        <a:t>isWithinForecastRange</a:t>
+                      </a:r>
+                      <a:endParaRPr lang="en-US" sz="1100" dirty="0"/>
+                    </a:p>
+                  </a:txBody>
+                  <a:tcPr marL="101600" marR="101600" marT="50800" marB="50800" anchor="ctr">
+                    <a:lnL w="0" cap="flat" cmpd="sng" algn="ctr">
+                      <a:noFill/>
+                    </a:lnL>
+                    <a:lnR w="0" cap="flat" cmpd="sng" algn="ctr">
+                      <a:noFill/>
+                    </a:lnR>
+                    <a:lnT w="0" cap="flat" cmpd="sng" algn="ctr">
+                      <a:noFill/>
+                    </a:lnT>
+                    <a:lnB w="0" cap="flat" cmpd="sng" algn="ctr">
+                      <a:noFill/>
+                    </a:lnB>
+                    <a:solidFill>
+                      <a:srgbClr val="FFFFFF"/>
+                    </a:solidFill>
+                  </a:tcPr>
+                </a:tc>
+                <a:tc>
+                  <a:txBody>
+                    <a:bodyPr/>
+                    <a:lstStyle/>
+                    <a:p>
+                      <a:pPr indent="0" marL="0">
+                        <a:buNone/>
+                      </a:pPr>
+                      <a:r>
+                        <a:rPr lang="en-US" sz="1100" b="1" dirty="0">
+                          <a:solidFill>
+                            <a:srgbClr val="0B8457"/>
+                          </a:solidFill>
+                        </a:rPr>
+                        <a:t>통과</a:t>
+                      </a:r>
+                      <a:endParaRPr lang="en-US" sz="1100" dirty="0"/>
+                    </a:p>
+                  </a:txBody>
+                  <a:tcPr marL="101600" marR="101600" marT="50800" marB="50800" anchor="ctr">
+                    <a:lnL w="0" cap="flat" cmpd="sng" algn="ctr">
+                      <a:noFill/>
+                    </a:lnL>
+                    <a:lnR w="0" cap="flat" cmpd="sng" algn="ctr">
+                      <a:noFill/>
+                    </a:lnR>
+                    <a:lnT w="0" cap="flat" cmpd="sng" algn="ctr">
+                      <a:noFill/>
+                    </a:lnT>
+                    <a:lnB w="0" cap="flat" cmpd="sng" algn="ctr">
+                      <a:noFill/>
+                    </a:lnB>
+                    <a:solidFill>
+                      <a:srgbClr val="FFFFFF"/>
+                    </a:solidFill>
+                  </a:tcPr>
+                </a:tc>
+                <a:tc>
+                  <a:txBody>
+                    <a:bodyPr/>
+                    <a:lstStyle/>
+                    <a:p>
+                      <a:pPr indent="0" marL="0">
+                        <a:buNone/>
+                      </a:pPr>
+                      <a:r>
+                        <a:rPr lang="en-US" sz="1100" dirty="0">
+                          <a:solidFill>
+                            <a:srgbClr val="17282A"/>
+                          </a:solidFill>
+                        </a:rPr>
+                        <a:t>2026-07-28</a:t>
+                      </a:r>
+                      <a:endParaRPr lang="en-US" sz="1100" dirty="0"/>
+                    </a:p>
+                  </a:txBody>
+                  <a:tcPr marL="101600" marR="101600" marT="50800" marB="50800" anchor="ctr">
+                    <a:lnL w="0" cap="flat" cmpd="sng" algn="ctr">
+                      <a:noFill/>
+                    </a:lnL>
+                    <a:lnR w="0" cap="flat" cmpd="sng" algn="ctr">
+                      <a:noFill/>
+                    </a:lnR>
+                    <a:lnT w="0" cap="flat" cmpd="sng" algn="ctr">
+                      <a:noFill/>
+                    </a:lnT>
+                    <a:lnB w="0" cap="flat" cmpd="sng" algn="ctr">
+                      <a:noFill/>
+                    </a:lnB>
+                    <a:solidFill>
+                      <a:srgbClr val="FFFFFF"/>
+                    </a:solidFill>
+                  </a:tcPr>
+                </a:tc>
+                <a:tc>
+                  <a:txBody>
+                    <a:bodyPr/>
+                    <a:lstStyle/>
+                    <a:p>
+                      <a:pPr indent="0" marL="0">
+                        <a:buNone/>
+                      </a:pPr>
+                      <a:r>
+                        <a:rPr lang="en-US" sz="1100" dirty="0">
+                          <a:solidFill>
+                            <a:srgbClr val="17282A"/>
+                          </a:solidFill>
+                        </a:rPr>
+                        <a:t>4개 케이스(경계값 포함)</a:t>
+                      </a:r>
+                      <a:endParaRPr lang="en-US" sz="1100" dirty="0"/>
+                    </a:p>
+                  </a:txBody>
+                  <a:tcPr marL="101600" marR="101600" marT="50800" marB="50800" anchor="ctr">
+                    <a:lnL w="0" cap="flat" cmpd="sng" algn="ctr">
+                      <a:noFill/>
+                    </a:lnL>
+                    <a:lnR w="0" cap="flat" cmpd="sng" algn="ctr">
+                      <a:noFill/>
+                    </a:lnR>
+                    <a:lnT w="0" cap="flat" cmpd="sng" algn="ctr">
+                      <a:noFill/>
+                    </a:lnT>
+                    <a:lnB w="0" cap="flat" cmpd="sng" algn="ctr">
+                      <a:noFill/>
+                    </a:lnB>
+                    <a:solidFill>
+                      <a:srgbClr val="FFFFFF"/>
+                    </a:solidFill>
+                  </a:tcPr>
+                </a:tc>
+              </a:tr>
+              <a:tr h="560070">
+                <a:tc>
+                  <a:txBody>
+                    <a:bodyPr/>
+                    <a:lstStyle/>
+                    <a:p>
+                      <a:pPr indent="0" marL="0">
+                        <a:buNone/>
+                      </a:pPr>
+                      <a:r>
+                        <a:rPr lang="en-US" sz="1100" dirty="0">
+                          <a:solidFill>
+                            <a:srgbClr val="17282A"/>
+                          </a:solidFill>
+                        </a:rPr>
+                        <a:t>lib/utils/round-format.test.ts</a:t>
+                      </a:r>
+                      <a:endParaRPr lang="en-US" sz="1100" dirty="0"/>
+                    </a:p>
+                  </a:txBody>
+                  <a:tcPr marL="101600" marR="101600" marT="50800" marB="50800" anchor="ctr">
+                    <a:lnL w="0" cap="flat" cmpd="sng" algn="ctr">
+                      <a:noFill/>
+                    </a:lnL>
+                    <a:lnR w="0" cap="flat" cmpd="sng" algn="ctr">
+                      <a:noFill/>
+                    </a:lnR>
+                    <a:lnT w="0" cap="flat" cmpd="sng" algn="ctr">
+                      <a:noFill/>
+                    </a:lnT>
+                    <a:lnB w="0" cap="flat" cmpd="sng" algn="ctr">
+                      <a:noFill/>
+                    </a:lnB>
+                    <a:solidFill>
+                      <a:srgbClr val="F2F7F7"/>
+                    </a:solidFill>
+                  </a:tcPr>
+                </a:tc>
+                <a:tc>
+                  <a:txBody>
+                    <a:bodyPr/>
+                    <a:lstStyle/>
+                    <a:p>
+                      <a:pPr indent="0" marL="0">
+                        <a:buNone/>
+                      </a:pPr>
+                      <a:r>
+                        <a:rPr lang="en-US" sz="1100" dirty="0">
+                          <a:solidFill>
+                            <a:srgbClr val="17282A"/>
+                          </a:solidFill>
+                        </a:rPr>
+                        <a:t>라운드 날짜·시간 포맷 함수</a:t>
+                      </a:r>
+                      <a:endParaRPr lang="en-US" sz="1100" dirty="0"/>
+                    </a:p>
+                  </a:txBody>
+                  <a:tcPr marL="101600" marR="101600" marT="50800" marB="50800" anchor="ctr">
+                    <a:lnL w="0" cap="flat" cmpd="sng" algn="ctr">
+                      <a:noFill/>
+                    </a:lnL>
+                    <a:lnR w="0" cap="flat" cmpd="sng" algn="ctr">
+                      <a:noFill/>
+                    </a:lnR>
+                    <a:lnT w="0" cap="flat" cmpd="sng" algn="ctr">
+                      <a:noFill/>
+                    </a:lnT>
+                    <a:lnB w="0" cap="flat" cmpd="sng" algn="ctr">
+                      <a:noFill/>
+                    </a:lnB>
+                    <a:solidFill>
+                      <a:srgbClr val="F2F7F7"/>
+                    </a:solidFill>
+                  </a:tcPr>
+                </a:tc>
+                <a:tc>
+                  <a:txBody>
+                    <a:bodyPr/>
+                    <a:lstStyle/>
+                    <a:p>
+                      <a:pPr indent="0" marL="0">
+                        <a:buNone/>
+                      </a:pPr>
+                      <a:r>
+                        <a:rPr lang="en-US" sz="1100" b="1" dirty="0">
+                          <a:solidFill>
+                            <a:srgbClr val="0B8457"/>
+                          </a:solidFill>
+                        </a:rPr>
+                        <a:t>통과</a:t>
+                      </a:r>
+                      <a:endParaRPr lang="en-US" sz="1100" dirty="0"/>
+                    </a:p>
+                  </a:txBody>
+                  <a:tcPr marL="101600" marR="101600" marT="50800" marB="50800" anchor="ctr">
+                    <a:lnL w="0" cap="flat" cmpd="sng" algn="ctr">
+                      <a:noFill/>
+                    </a:lnL>
+                    <a:lnR w="0" cap="flat" cmpd="sng" algn="ctr">
+                      <a:noFill/>
+                    </a:lnR>
+                    <a:lnT w="0" cap="flat" cmpd="sng" algn="ctr">
+                      <a:noFill/>
+                    </a:lnT>
+                    <a:lnB w="0" cap="flat" cmpd="sng" algn="ctr">
+                      <a:noFill/>
+                    </a:lnB>
+                    <a:solidFill>
+                      <a:srgbClr val="F2F7F7"/>
+                    </a:solidFill>
+                  </a:tcPr>
+                </a:tc>
+                <a:tc>
+                  <a:txBody>
+                    <a:bodyPr/>
+                    <a:lstStyle/>
+                    <a:p>
+                      <a:pPr indent="0" marL="0">
+                        <a:buNone/>
+                      </a:pPr>
+                      <a:r>
+                        <a:rPr lang="en-US" sz="1100" dirty="0">
+                          <a:solidFill>
+                            <a:srgbClr val="17282A"/>
+                          </a:solidFill>
+                        </a:rPr>
+                        <a:t>2026-07-28</a:t>
+                      </a:r>
+                      <a:endParaRPr lang="en-US" sz="1100" dirty="0"/>
+                    </a:p>
+                  </a:txBody>
+                  <a:tcPr marL="101600" marR="101600" marT="50800" marB="50800" anchor="ctr">
+                    <a:lnL w="0" cap="flat" cmpd="sng" algn="ctr">
+                      <a:noFill/>
+                    </a:lnL>
+                    <a:lnR w="0" cap="flat" cmpd="sng" algn="ctr">
+                      <a:noFill/>
+                    </a:lnR>
+                    <a:lnT w="0" cap="flat" cmpd="sng" algn="ctr">
+                      <a:noFill/>
+                    </a:lnT>
+                    <a:lnB w="0" cap="flat" cmpd="sng" algn="ctr">
+                      <a:noFill/>
+                    </a:lnB>
+                    <a:solidFill>
+                      <a:srgbClr val="F2F7F7"/>
+                    </a:solidFill>
+                  </a:tcPr>
+                </a:tc>
+                <a:tc>
+                  <a:txBody>
+                    <a:bodyPr/>
+                    <a:lstStyle/>
+                    <a:p>
+                      <a:pPr indent="0" marL="0">
+                        <a:buNone/>
+                      </a:pPr>
+                      <a:r>
+                        <a:rPr lang="en-US" sz="1100" dirty="0">
+                          <a:solidFill>
+                            <a:srgbClr val="17282A"/>
+                          </a:solidFill>
+                        </a:rPr>
+                        <a:t>8개 케이스</a:t>
+                      </a:r>
+                      <a:endParaRPr lang="en-US" sz="1100" dirty="0"/>
+                    </a:p>
+                  </a:txBody>
+                  <a:tcPr marL="101600" marR="101600" marT="50800" marB="50800" anchor="ctr">
+                    <a:lnL w="0" cap="flat" cmpd="sng" algn="ctr">
+                      <a:noFill/>
+                    </a:lnL>
+                    <a:lnR w="0" cap="flat" cmpd="sng" algn="ctr">
+                      <a:noFill/>
+                    </a:lnR>
+                    <a:lnT w="0" cap="flat" cmpd="sng" algn="ctr">
+                      <a:noFill/>
+                    </a:lnT>
+                    <a:lnB w="0" cap="flat" cmpd="sng" algn="ctr">
+                      <a:noFill/>
+                    </a:lnB>
+                    <a:solidFill>
+                      <a:srgbClr val="F2F7F7"/>
+                    </a:solidFill>
+                  </a:tcPr>
+                </a:tc>
+              </a:tr>
+              <a:tr h="560070">
+                <a:tc>
+                  <a:txBody>
+                    <a:bodyPr/>
+                    <a:lstStyle/>
+                    <a:p>
+                      <a:pPr indent="0" marL="0">
+                        <a:buNone/>
+                      </a:pPr>
+                      <a:r>
+                        <a:rPr lang="en-US" sz="1100" dirty="0">
+                          <a:solidFill>
+                            <a:srgbClr val="17282A"/>
+                          </a:solidFill>
+                        </a:rPr>
+                        <a:t>lib/utils/course-format.test.ts</a:t>
+                      </a:r>
+                      <a:endParaRPr lang="en-US" sz="1100" dirty="0"/>
+                    </a:p>
+                  </a:txBody>
+                  <a:tcPr marL="101600" marR="101600" marT="50800" marB="50800" anchor="ctr">
+                    <a:lnL w="0" cap="flat" cmpd="sng" algn="ctr">
+                      <a:noFill/>
+                    </a:lnL>
+                    <a:lnR w="0" cap="flat" cmpd="sng" algn="ctr">
+                      <a:noFill/>
+                    </a:lnR>
+                    <a:lnT w="0" cap="flat" cmpd="sng" algn="ctr">
+                      <a:noFill/>
+                    </a:lnT>
+                    <a:lnB w="0" cap="flat" cmpd="sng" algn="ctr">
+                      <a:noFill/>
+                    </a:lnB>
+                    <a:solidFill>
+                      <a:srgbClr val="FFFFFF"/>
+                    </a:solidFill>
+                  </a:tcPr>
+                </a:tc>
+                <a:tc>
+                  <a:txBody>
+                    <a:bodyPr/>
+                    <a:lstStyle/>
+                    <a:p>
+                      <a:pPr indent="0" marL="0">
+                        <a:buNone/>
+                      </a:pPr>
+                      <a:r>
+                        <a:rPr lang="en-US" sz="1100" dirty="0">
+                          <a:solidFill>
+                            <a:srgbClr val="17282A"/>
+                          </a:solidFill>
+                        </a:rPr>
+                        <a:t>골프장 주소·구분 포맷 함수</a:t>
+                      </a:r>
+                      <a:endParaRPr lang="en-US" sz="1100" dirty="0"/>
+                    </a:p>
+                  </a:txBody>
+                  <a:tcPr marL="101600" marR="101600" marT="50800" marB="50800" anchor="ctr">
+                    <a:lnL w="0" cap="flat" cmpd="sng" algn="ctr">
+                      <a:noFill/>
+                    </a:lnL>
+                    <a:lnR w="0" cap="flat" cmpd="sng" algn="ctr">
+                      <a:noFill/>
+                    </a:lnR>
+                    <a:lnT w="0" cap="flat" cmpd="sng" algn="ctr">
+                      <a:noFill/>
+                    </a:lnT>
+                    <a:lnB w="0" cap="flat" cmpd="sng" algn="ctr">
+                      <a:noFill/>
+                    </a:lnB>
+                    <a:solidFill>
+                      <a:srgbClr val="FFFFFF"/>
+                    </a:solidFill>
+                  </a:tcPr>
+                </a:tc>
+                <a:tc>
+                  <a:txBody>
+                    <a:bodyPr/>
+                    <a:lstStyle/>
+                    <a:p>
+                      <a:pPr indent="0" marL="0">
+                        <a:buNone/>
+                      </a:pPr>
+                      <a:r>
+                        <a:rPr lang="en-US" sz="1100" b="1" dirty="0">
+                          <a:solidFill>
+                            <a:srgbClr val="0B8457"/>
+                          </a:solidFill>
+                        </a:rPr>
+                        <a:t>통과</a:t>
+                      </a:r>
+                      <a:endParaRPr lang="en-US" sz="1100" dirty="0"/>
+                    </a:p>
+                  </a:txBody>
+                  <a:tcPr marL="101600" marR="101600" marT="50800" marB="50800" anchor="ctr">
+                    <a:lnL w="0" cap="flat" cmpd="sng" algn="ctr">
+                      <a:noFill/>
+                    </a:lnL>
+                    <a:lnR w="0" cap="flat" cmpd="sng" algn="ctr">
+                      <a:noFill/>
+                    </a:lnR>
+                    <a:lnT w="0" cap="flat" cmpd="sng" algn="ctr">
+                      <a:noFill/>
+                    </a:lnT>
+                    <a:lnB w="0" cap="flat" cmpd="sng" algn="ctr">
+                      <a:noFill/>
+                    </a:lnB>
+                    <a:solidFill>
+                      <a:srgbClr val="FFFFFF"/>
+                    </a:solidFill>
+                  </a:tcPr>
+                </a:tc>
+                <a:tc>
+                  <a:txBody>
+                    <a:bodyPr/>
+                    <a:lstStyle/>
+                    <a:p>
+                      <a:pPr indent="0" marL="0">
+                        <a:buNone/>
+                      </a:pPr>
+                      <a:r>
+                        <a:rPr lang="en-US" sz="1100" dirty="0">
+                          <a:solidFill>
+                            <a:srgbClr val="17282A"/>
+                          </a:solidFill>
+                        </a:rPr>
+                        <a:t>2026-07-28</a:t>
+                      </a:r>
+                      <a:endParaRPr lang="en-US" sz="1100" dirty="0"/>
+                    </a:p>
+                  </a:txBody>
+                  <a:tcPr marL="101600" marR="101600" marT="50800" marB="50800" anchor="ctr">
+                    <a:lnL w="0" cap="flat" cmpd="sng" algn="ctr">
+                      <a:noFill/>
+                    </a:lnL>
+                    <a:lnR w="0" cap="flat" cmpd="sng" algn="ctr">
+                      <a:noFill/>
+                    </a:lnR>
+                    <a:lnT w="0" cap="flat" cmpd="sng" algn="ctr">
+                      <a:noFill/>
+                    </a:lnT>
+                    <a:lnB w="0" cap="flat" cmpd="sng" algn="ctr">
+                      <a:noFill/>
+                    </a:lnB>
+                    <a:solidFill>
+                      <a:srgbClr val="FFFFFF"/>
+                    </a:solidFill>
+                  </a:tcPr>
+                </a:tc>
+                <a:tc>
+                  <a:txBody>
+                    <a:bodyPr/>
+                    <a:lstStyle/>
+                    <a:p>
+                      <a:pPr indent="0" marL="0">
+                        <a:buNone/>
+                      </a:pPr>
+                      <a:r>
+                        <a:rPr lang="en-US" sz="1100" dirty="0">
+                          <a:solidFill>
+                            <a:srgbClr val="17282A"/>
+                          </a:solidFill>
+                        </a:rPr>
+                        <a:t>6개 케이스</a:t>
+                      </a:r>
+                      <a:endParaRPr lang="en-US" sz="1100" dirty="0"/>
+                    </a:p>
+                  </a:txBody>
+                  <a:tcPr marL="101600" marR="101600" marT="50800" marB="50800" anchor="ctr">
+                    <a:lnL w="0" cap="flat" cmpd="sng" algn="ctr">
+                      <a:noFill/>
+                    </a:lnL>
+                    <a:lnR w="0" cap="flat" cmpd="sng" algn="ctr">
+                      <a:noFill/>
+                    </a:lnR>
+                    <a:lnT w="0" cap="flat" cmpd="sng" algn="ctr">
+                      <a:noFill/>
+                    </a:lnT>
+                    <a:lnB w="0" cap="flat" cmpd="sng" algn="ctr">
+                      <a:noFill/>
+                    </a:lnB>
+                    <a:solidFill>
+                      <a:srgbClr val="FFFFFF"/>
+                    </a:solidFill>
+                  </a:tcPr>
+                </a:tc>
+              </a:tr>
+              <a:tr h="560070">
+                <a:tc>
+                  <a:txBody>
+                    <a:bodyPr/>
+                    <a:lstStyle/>
+                    <a:p>
+                      <a:pPr indent="0" marL="0">
+                        <a:buNone/>
+                      </a:pPr>
+                      <a:r>
+                        <a:rPr lang="en-US" sz="1100" dirty="0">
+                          <a:solidFill>
+                            <a:srgbClr val="17282A"/>
+                          </a:solidFill>
+                        </a:rPr>
+                        <a:t>lib/services/round-duplicate.test.ts</a:t>
+                      </a:r>
+                      <a:endParaRPr lang="en-US" sz="1100" dirty="0"/>
+                    </a:p>
+                  </a:txBody>
+                  <a:tcPr marL="101600" marR="101600" marT="50800" marB="50800" anchor="ctr">
+                    <a:lnL w="0" cap="flat" cmpd="sng" algn="ctr">
+                      <a:noFill/>
+                    </a:lnL>
+                    <a:lnR w="0" cap="flat" cmpd="sng" algn="ctr">
+                      <a:noFill/>
+                    </a:lnR>
+                    <a:lnT w="0" cap="flat" cmpd="sng" algn="ctr">
+                      <a:noFill/>
+                    </a:lnT>
+                    <a:lnB w="0" cap="flat" cmpd="sng" algn="ctr">
+                      <a:noFill/>
+                    </a:lnB>
+                    <a:solidFill>
+                      <a:srgbClr val="F2F7F7"/>
+                    </a:solidFill>
+                  </a:tcPr>
+                </a:tc>
+                <a:tc>
+                  <a:txBody>
+                    <a:bodyPr/>
+                    <a:lstStyle/>
+                    <a:p>
+                      <a:pPr indent="0" marL="0">
+                        <a:buNone/>
+                      </a:pPr>
+                      <a:r>
+                        <a:rPr lang="en-US" sz="1100" dirty="0">
+                          <a:solidFill>
+                            <a:srgbClr val="17282A"/>
+                          </a:solidFill>
+                        </a:rPr>
+                        <a:t>findDuplicateRound</a:t>
+                      </a:r>
+                      <a:endParaRPr lang="en-US" sz="1100" dirty="0"/>
+                    </a:p>
+                  </a:txBody>
+                  <a:tcPr marL="101600" marR="101600" marT="50800" marB="50800" anchor="ctr">
+                    <a:lnL w="0" cap="flat" cmpd="sng" algn="ctr">
+                      <a:noFill/>
+                    </a:lnL>
+                    <a:lnR w="0" cap="flat" cmpd="sng" algn="ctr">
+                      <a:noFill/>
+                    </a:lnR>
+                    <a:lnT w="0" cap="flat" cmpd="sng" algn="ctr">
+                      <a:noFill/>
+                    </a:lnT>
+                    <a:lnB w="0" cap="flat" cmpd="sng" algn="ctr">
+                      <a:noFill/>
+                    </a:lnB>
+                    <a:solidFill>
+                      <a:srgbClr val="F2F7F7"/>
+                    </a:solidFill>
+                  </a:tcPr>
+                </a:tc>
+                <a:tc>
+                  <a:txBody>
+                    <a:bodyPr/>
+                    <a:lstStyle/>
+                    <a:p>
+                      <a:pPr indent="0" marL="0">
+                        <a:buNone/>
+                      </a:pPr>
+                      <a:r>
+                        <a:rPr lang="en-US" sz="1100" b="1" dirty="0">
+                          <a:solidFill>
+                            <a:srgbClr val="8A9A9C"/>
                           </a:solidFill>
                         </a:rPr>
                         <a:t>예정</a:t>
@@ -2641,7 +3389,7 @@
                             <a:srgbClr val="17282A"/>
                           </a:solidFill>
                         </a:rPr>
-                        <a:t>좌표 경계값 포함</a:t>
+                        <a:t>prisma mock 필요</a:t>
                       </a:r>
                       <a:endParaRPr lang="en-US" sz="1100" dirty="0"/>
                     </a:p>
@@ -2665,381 +3413,7 @@
                   </a:tcPr>
                 </a:tc>
               </a:tr>
-              <a:tr h="746760">
-                <a:tc>
-                  <a:txBody>
-                    <a:bodyPr/>
-                    <a:lstStyle/>
-                    <a:p>
-                      <a:pPr indent="0" marL="0">
-                        <a:buNone/>
-                      </a:pPr>
-                      <a:r>
-                        <a:rPr lang="en-US" sz="1100" dirty="0">
-                          <a:solidFill>
-                            <a:srgbClr val="17282A"/>
-                          </a:solidFill>
-                        </a:rPr>
-                        <a:t>lib/weather/kma.test.ts</a:t>
-                      </a:r>
-                      <a:endParaRPr lang="en-US" sz="1100" dirty="0"/>
-                    </a:p>
-                  </a:txBody>
-                  <a:tcPr marL="101600" marR="101600" marT="50800" marB="50800" anchor="ctr">
-                    <a:lnL w="0" cap="flat" cmpd="sng" algn="ctr">
-                      <a:noFill/>
-                    </a:lnL>
-                    <a:lnR w="0" cap="flat" cmpd="sng" algn="ctr">
-                      <a:noFill/>
-                    </a:lnR>
-                    <a:lnT w="0" cap="flat" cmpd="sng" algn="ctr">
-                      <a:noFill/>
-                    </a:lnT>
-                    <a:lnB w="0" cap="flat" cmpd="sng" algn="ctr">
-                      <a:noFill/>
-                    </a:lnB>
-                    <a:solidFill>
-                      <a:srgbClr val="FFFFFF"/>
-                    </a:solidFill>
-                  </a:tcPr>
-                </a:tc>
-                <a:tc>
-                  <a:txBody>
-                    <a:bodyPr/>
-                    <a:lstStyle/>
-                    <a:p>
-                      <a:pPr indent="0" marL="0">
-                        <a:buNone/>
-                      </a:pPr>
-                      <a:r>
-                        <a:rPr lang="en-US" sz="1100" dirty="0">
-                          <a:solidFill>
-                            <a:srgbClr val="17282A"/>
-                          </a:solidFill>
-                        </a:rPr>
-                        <a:t>isWithinForecastRange</a:t>
-                      </a:r>
-                      <a:endParaRPr lang="en-US" sz="1100" dirty="0"/>
-                    </a:p>
-                  </a:txBody>
-                  <a:tcPr marL="101600" marR="101600" marT="50800" marB="50800" anchor="ctr">
-                    <a:lnL w="0" cap="flat" cmpd="sng" algn="ctr">
-                      <a:noFill/>
-                    </a:lnL>
-                    <a:lnR w="0" cap="flat" cmpd="sng" algn="ctr">
-                      <a:noFill/>
-                    </a:lnR>
-                    <a:lnT w="0" cap="flat" cmpd="sng" algn="ctr">
-                      <a:noFill/>
-                    </a:lnT>
-                    <a:lnB w="0" cap="flat" cmpd="sng" algn="ctr">
-                      <a:noFill/>
-                    </a:lnB>
-                    <a:solidFill>
-                      <a:srgbClr val="FFFFFF"/>
-                    </a:solidFill>
-                  </a:tcPr>
-                </a:tc>
-                <a:tc>
-                  <a:txBody>
-                    <a:bodyPr/>
-                    <a:lstStyle/>
-                    <a:p>
-                      <a:pPr indent="0" marL="0">
-                        <a:buNone/>
-                      </a:pPr>
-                      <a:r>
-                        <a:rPr lang="en-US" sz="1100" dirty="0">
-                          <a:solidFill>
-                            <a:srgbClr val="17282A"/>
-                          </a:solidFill>
-                        </a:rPr>
-                        <a:t>예정</a:t>
-                      </a:r>
-                      <a:endParaRPr lang="en-US" sz="1100" dirty="0"/>
-                    </a:p>
-                  </a:txBody>
-                  <a:tcPr marL="101600" marR="101600" marT="50800" marB="50800" anchor="ctr">
-                    <a:lnL w="0" cap="flat" cmpd="sng" algn="ctr">
-                      <a:noFill/>
-                    </a:lnL>
-                    <a:lnR w="0" cap="flat" cmpd="sng" algn="ctr">
-                      <a:noFill/>
-                    </a:lnR>
-                    <a:lnT w="0" cap="flat" cmpd="sng" algn="ctr">
-                      <a:noFill/>
-                    </a:lnT>
-                    <a:lnB w="0" cap="flat" cmpd="sng" algn="ctr">
-                      <a:noFill/>
-                    </a:lnB>
-                    <a:solidFill>
-                      <a:srgbClr val="FFFFFF"/>
-                    </a:solidFill>
-                  </a:tcPr>
-                </a:tc>
-                <a:tc>
-                  <a:txBody>
-                    <a:bodyPr/>
-                    <a:lstStyle/>
-                    <a:p>
-                      <a:pPr indent="0" marL="0">
-                        <a:buNone/>
-                      </a:pPr>
-                      <a:r>
-                        <a:rPr lang="en-US" sz="1100" dirty="0">
-                          <a:solidFill>
-                            <a:srgbClr val="17282A"/>
-                          </a:solidFill>
-                        </a:rPr>
-                        <a:t>-</a:t>
-                      </a:r>
-                      <a:endParaRPr lang="en-US" sz="1100" dirty="0"/>
-                    </a:p>
-                  </a:txBody>
-                  <a:tcPr marL="101600" marR="101600" marT="50800" marB="50800" anchor="ctr">
-                    <a:lnL w="0" cap="flat" cmpd="sng" algn="ctr">
-                      <a:noFill/>
-                    </a:lnL>
-                    <a:lnR w="0" cap="flat" cmpd="sng" algn="ctr">
-                      <a:noFill/>
-                    </a:lnR>
-                    <a:lnT w="0" cap="flat" cmpd="sng" algn="ctr">
-                      <a:noFill/>
-                    </a:lnT>
-                    <a:lnB w="0" cap="flat" cmpd="sng" algn="ctr">
-                      <a:noFill/>
-                    </a:lnB>
-                    <a:solidFill>
-                      <a:srgbClr val="FFFFFF"/>
-                    </a:solidFill>
-                  </a:tcPr>
-                </a:tc>
-                <a:tc>
-                  <a:txBody>
-                    <a:bodyPr/>
-                    <a:lstStyle/>
-                    <a:p>
-                      <a:pPr indent="0" marL="0">
-                        <a:buNone/>
-                      </a:pPr>
-                      <a:r>
-                        <a:rPr lang="en-US" sz="1100" dirty="0">
-                          <a:solidFill>
-                            <a:srgbClr val="17282A"/>
-                          </a:solidFill>
-                        </a:rPr>
-                        <a:t>범위 경계값</a:t>
-                      </a:r>
-                      <a:endParaRPr lang="en-US" sz="1100" dirty="0"/>
-                    </a:p>
-                  </a:txBody>
-                  <a:tcPr marL="101600" marR="101600" marT="50800" marB="50800" anchor="ctr">
-                    <a:lnL w="0" cap="flat" cmpd="sng" algn="ctr">
-                      <a:noFill/>
-                    </a:lnL>
-                    <a:lnR w="0" cap="flat" cmpd="sng" algn="ctr">
-                      <a:noFill/>
-                    </a:lnR>
-                    <a:lnT w="0" cap="flat" cmpd="sng" algn="ctr">
-                      <a:noFill/>
-                    </a:lnT>
-                    <a:lnB w="0" cap="flat" cmpd="sng" algn="ctr">
-                      <a:noFill/>
-                    </a:lnB>
-                    <a:solidFill>
-                      <a:srgbClr val="FFFFFF"/>
-                    </a:solidFill>
-                  </a:tcPr>
-                </a:tc>
-              </a:tr>
-              <a:tr h="746760">
-                <a:tc>
-                  <a:txBody>
-                    <a:bodyPr/>
-                    <a:lstStyle/>
-                    <a:p>
-                      <a:pPr indent="0" marL="0">
-                        <a:buNone/>
-                      </a:pPr>
-                      <a:r>
-                        <a:rPr lang="en-US" sz="1100" dirty="0">
-                          <a:solidFill>
-                            <a:srgbClr val="17282A"/>
-                          </a:solidFill>
-                        </a:rPr>
-                        <a:t>lib/services/round-duplicate.test.ts</a:t>
-                      </a:r>
-                      <a:endParaRPr lang="en-US" sz="1100" dirty="0"/>
-                    </a:p>
-                  </a:txBody>
-                  <a:tcPr marL="101600" marR="101600" marT="50800" marB="50800" anchor="ctr">
-                    <a:lnL w="0" cap="flat" cmpd="sng" algn="ctr">
-                      <a:noFill/>
-                    </a:lnL>
-                    <a:lnR w="0" cap="flat" cmpd="sng" algn="ctr">
-                      <a:noFill/>
-                    </a:lnR>
-                    <a:lnT w="0" cap="flat" cmpd="sng" algn="ctr">
-                      <a:noFill/>
-                    </a:lnT>
-                    <a:lnB w="0" cap="flat" cmpd="sng" algn="ctr">
-                      <a:noFill/>
-                    </a:lnB>
-                    <a:solidFill>
-                      <a:srgbClr val="F2F7F7"/>
-                    </a:solidFill>
-                  </a:tcPr>
-                </a:tc>
-                <a:tc>
-                  <a:txBody>
-                    <a:bodyPr/>
-                    <a:lstStyle/>
-                    <a:p>
-                      <a:pPr indent="0" marL="0">
-                        <a:buNone/>
-                      </a:pPr>
-                      <a:r>
-                        <a:rPr lang="en-US" sz="1100" dirty="0">
-                          <a:solidFill>
-                            <a:srgbClr val="17282A"/>
-                          </a:solidFill>
-                        </a:rPr>
-                        <a:t>findDuplicateRound</a:t>
-                      </a:r>
-                      <a:endParaRPr lang="en-US" sz="1100" dirty="0"/>
-                    </a:p>
-                  </a:txBody>
-                  <a:tcPr marL="101600" marR="101600" marT="50800" marB="50800" anchor="ctr">
-                    <a:lnL w="0" cap="flat" cmpd="sng" algn="ctr">
-                      <a:noFill/>
-                    </a:lnL>
-                    <a:lnR w="0" cap="flat" cmpd="sng" algn="ctr">
-                      <a:noFill/>
-                    </a:lnR>
-                    <a:lnT w="0" cap="flat" cmpd="sng" algn="ctr">
-                      <a:noFill/>
-                    </a:lnT>
-                    <a:lnB w="0" cap="flat" cmpd="sng" algn="ctr">
-                      <a:noFill/>
-                    </a:lnB>
-                    <a:solidFill>
-                      <a:srgbClr val="F2F7F7"/>
-                    </a:solidFill>
-                  </a:tcPr>
-                </a:tc>
-                <a:tc>
-                  <a:txBody>
-                    <a:bodyPr/>
-                    <a:lstStyle/>
-                    <a:p>
-                      <a:pPr indent="0" marL="0">
-                        <a:buNone/>
-                      </a:pPr>
-                      <a:r>
-                        <a:rPr lang="en-US" sz="1100" dirty="0">
-                          <a:solidFill>
-                            <a:srgbClr val="17282A"/>
-                          </a:solidFill>
-                        </a:rPr>
-                        <a:t>예정</a:t>
-                      </a:r>
-                      <a:endParaRPr lang="en-US" sz="1100" dirty="0"/>
-                    </a:p>
-                  </a:txBody>
-                  <a:tcPr marL="101600" marR="101600" marT="50800" marB="50800" anchor="ctr">
-                    <a:lnL w="0" cap="flat" cmpd="sng" algn="ctr">
-                      <a:noFill/>
-                    </a:lnL>
-                    <a:lnR w="0" cap="flat" cmpd="sng" algn="ctr">
-                      <a:noFill/>
-                    </a:lnR>
-                    <a:lnT w="0" cap="flat" cmpd="sng" algn="ctr">
-                      <a:noFill/>
-                    </a:lnT>
-                    <a:lnB w="0" cap="flat" cmpd="sng" algn="ctr">
-                      <a:noFill/>
-                    </a:lnB>
-                    <a:solidFill>
-                      <a:srgbClr val="F2F7F7"/>
-                    </a:solidFill>
-                  </a:tcPr>
-                </a:tc>
-                <a:tc>
-                  <a:txBody>
-                    <a:bodyPr/>
-                    <a:lstStyle/>
-                    <a:p>
-                      <a:pPr indent="0" marL="0">
-                        <a:buNone/>
-                      </a:pPr>
-                      <a:r>
-                        <a:rPr lang="en-US" sz="1100" dirty="0">
-                          <a:solidFill>
-                            <a:srgbClr val="17282A"/>
-                          </a:solidFill>
-                        </a:rPr>
-                        <a:t>-</a:t>
-                      </a:r>
-                      <a:endParaRPr lang="en-US" sz="1100" dirty="0"/>
-                    </a:p>
-                  </a:txBody>
-                  <a:tcPr marL="101600" marR="101600" marT="50800" marB="50800" anchor="ctr">
-                    <a:lnL w="0" cap="flat" cmpd="sng" algn="ctr">
-                      <a:noFill/>
-                    </a:lnL>
-                    <a:lnR w="0" cap="flat" cmpd="sng" algn="ctr">
-                      <a:noFill/>
-                    </a:lnR>
-                    <a:lnT w="0" cap="flat" cmpd="sng" algn="ctr">
-                      <a:noFill/>
-                    </a:lnT>
-                    <a:lnB w="0" cap="flat" cmpd="sng" algn="ctr">
-                      <a:noFill/>
-                    </a:lnB>
-                    <a:solidFill>
-                      <a:srgbClr val="F2F7F7"/>
-                    </a:solidFill>
-                  </a:tcPr>
-                </a:tc>
-                <a:tc>
-                  <a:txBody>
-                    <a:bodyPr/>
-                    <a:lstStyle/>
-                    <a:p>
-                      <a:pPr indent="0" marL="0">
-                        <a:buNone/>
-                      </a:pPr>
-                      <a:r>
-                        <a:rPr lang="en-US" sz="1100" dirty="0">
-                          <a:solidFill>
-                            <a:srgbClr val="17282A"/>
-                          </a:solidFill>
-                        </a:rPr>
-                        <a:t>prisma mock 필요</a:t>
-                      </a:r>
-                      <a:endParaRPr lang="en-US" sz="1100" dirty="0"/>
-                    </a:p>
-                  </a:txBody>
-                  <a:tcPr marL="101600" marR="101600" marT="50800" marB="50800" anchor="ctr">
-                    <a:lnL w="0" cap="flat" cmpd="sng" algn="ctr">
-                      <a:noFill/>
-                    </a:lnL>
-                    <a:lnR w="0" cap="flat" cmpd="sng" algn="ctr">
-                      <a:noFill/>
-                    </a:lnR>
-                    <a:lnT w="0" cap="flat" cmpd="sng" algn="ctr">
-                      <a:noFill/>
-                    </a:lnT>
-                    <a:lnB w="0" cap="flat" cmpd="sng" algn="ctr">
-                      <a:noFill/>
-                    </a:lnB>
-                    <a:solidFill>
-                      <a:srgbClr val="F2F7F7"/>
-                    </a:solidFill>
-                  </a:tcPr>
-                </a:tc>
-              </a:tr>
-              <a:tr h="746760">
+              <a:tr h="560070">
                 <a:tc>
                   <a:txBody>
                     <a:bodyPr/>
@@ -3123,9 +3497,9 @@
                         <a:buNone/>
                       </a:pPr>
                       <a:r>
-                        <a:rPr lang="en-US" sz="1100" dirty="0">
+                        <a:rPr lang="en-US" sz="1100" b="1" dirty="0">
                           <a:solidFill>
-                            <a:srgbClr val="17282A"/>
+                            <a:srgbClr val="8A9A9C"/>
                           </a:solidFill>
                         </a:rPr>
                         <a:t>예정</a:t>
@@ -3679,9 +4053,9 @@
                         <a:buNone/>
                       </a:pPr>
                       <a:r>
-                        <a:rPr lang="en-US" sz="1100" dirty="0">
+                        <a:rPr lang="en-US" sz="1100" b="1" dirty="0">
                           <a:solidFill>
-                            <a:srgbClr val="17282A"/>
+                            <a:srgbClr val="8A9A9C"/>
                           </a:solidFill>
                         </a:rPr>
                         <a:t>예정</a:t>
@@ -3866,9 +4240,9 @@
                         <a:buNone/>
                       </a:pPr>
                       <a:r>
-                        <a:rPr lang="en-US" sz="1100" dirty="0">
+                        <a:rPr lang="en-US" sz="1100" b="1" dirty="0">
                           <a:solidFill>
-                            <a:srgbClr val="17282A"/>
+                            <a:srgbClr val="8A9A9C"/>
                           </a:solidFill>
                         </a:rPr>
                         <a:t>예정</a:t>
@@ -4053,9 +4427,9 @@
                         <a:buNone/>
                       </a:pPr>
                       <a:r>
-                        <a:rPr lang="en-US" sz="1100" dirty="0">
+                        <a:rPr lang="en-US" sz="1100" b="1" dirty="0">
                           <a:solidFill>
-                            <a:srgbClr val="17282A"/>
+                            <a:srgbClr val="8A9A9C"/>
                           </a:solidFill>
                         </a:rPr>
                         <a:t>예정</a:t>
@@ -4240,9 +4614,9 @@
                         <a:buNone/>
                       </a:pPr>
                       <a:r>
-                        <a:rPr lang="en-US" sz="1100" dirty="0">
+                        <a:rPr lang="en-US" sz="1100" b="1" dirty="0">
                           <a:solidFill>
-                            <a:srgbClr val="17282A"/>
+                            <a:srgbClr val="8A9A9C"/>
                           </a:solidFill>
                         </a:rPr>
                         <a:t>예정</a:t>
@@ -4427,9 +4801,9 @@
                         <a:buNone/>
                       </a:pPr>
                       <a:r>
-                        <a:rPr lang="en-US" sz="1100" dirty="0">
+                        <a:rPr lang="en-US" sz="1100" b="1" dirty="0">
                           <a:solidFill>
-                            <a:srgbClr val="17282A"/>
+                            <a:srgbClr val="8A9A9C"/>
                           </a:solidFill>
                         </a:rPr>
                         <a:t>예정</a:t>

--- a/doc/ScoreCaddie_테스트계획서.pptx
+++ b/doc/ScoreCaddie_테스트계획서.pptx
@@ -3312,10 +3312,10 @@
                       <a:r>
                         <a:rPr lang="en-US" sz="1100" b="1" dirty="0">
                           <a:solidFill>
-                            <a:srgbClr val="8A9A9C"/>
+                            <a:srgbClr val="0B8457"/>
                           </a:solidFill>
                         </a:rPr>
-                        <a:t>예정</a:t>
+                        <a:t>통과</a:t>
                       </a:r>
                       <a:endParaRPr lang="en-US" sz="1100" dirty="0"/>
                     </a:p>
@@ -3352,7 +3352,7 @@
                             <a:srgbClr val="17282A"/>
                           </a:solidFill>
                         </a:rPr>
-                        <a:t>-</a:t>
+                        <a:t>2026-07-28</a:t>
                       </a:r>
                       <a:endParaRPr lang="en-US" sz="1100" dirty="0"/>
                     </a:p>
@@ -3389,7 +3389,7 @@
                             <a:srgbClr val="17282A"/>
                           </a:solidFill>
                         </a:rPr>
-                        <a:t>prisma mock 필요</a:t>
+                        <a:t>2개 케이스(vi.mock으로 prisma 직접 대체)</a:t>
                       </a:r>
                       <a:endParaRPr lang="en-US" sz="1100" dirty="0"/>
                     </a:p>
@@ -3499,10 +3499,10 @@
                       <a:r>
                         <a:rPr lang="en-US" sz="1100" b="1" dirty="0">
                           <a:solidFill>
-                            <a:srgbClr val="8A9A9C"/>
+                            <a:srgbClr val="0B8457"/>
                           </a:solidFill>
                         </a:rPr>
-                        <a:t>예정</a:t>
+                        <a:t>통과</a:t>
                       </a:r>
                       <a:endParaRPr lang="en-US" sz="1100" dirty="0"/>
                     </a:p>
@@ -3539,7 +3539,7 @@
                             <a:srgbClr val="17282A"/>
                           </a:solidFill>
                         </a:rPr>
-                        <a:t>-</a:t>
+                        <a:t>2026-07-28</a:t>
                       </a:r>
                       <a:endParaRPr lang="en-US" sz="1100" dirty="0"/>
                     </a:p>
@@ -3576,7 +3576,7 @@
                             <a:srgbClr val="17282A"/>
                           </a:solidFill>
                         </a:rPr>
-                        <a:t>prisma mock 필요</a:t>
+                        <a:t>6개 케이스(vitest-mock-extended mockDeep 사용)</a:t>
                       </a:r>
                       <a:endParaRPr lang="en-US" sz="1100" dirty="0"/>
                     </a:p>

--- a/doc/ScoreCaddie_테스트계획서.pptx
+++ b/doc/ScoreCaddie_테스트계획서.pptx
@@ -3782,7 +3782,7 @@
                 <a:gridCol w="1554480"/>
                 <a:gridCol w="1645920"/>
               </a:tblGrid>
-              <a:tr h="746760">
+              <a:tr h="497840">
                 <a:tc>
                   <a:txBody>
                     <a:bodyPr/>
@@ -3969,7 +3969,7 @@
                   </a:tcPr>
                 </a:tc>
               </a:tr>
-              <a:tr h="746760">
+              <a:tr h="497840">
                 <a:tc>
                   <a:txBody>
                     <a:bodyPr/>
@@ -4055,6 +4055,754 @@
                       <a:r>
                         <a:rPr lang="en-US" sz="1100" b="1" dirty="0">
                           <a:solidFill>
+                            <a:srgbClr val="0B5C63"/>
+                          </a:solidFill>
+                        </a:rPr>
+                        <a:t>작성완료</a:t>
+                      </a:r>
+                      <a:endParaRPr lang="en-US" sz="1100" dirty="0"/>
+                    </a:p>
+                  </a:txBody>
+                  <a:tcPr marL="101600" marR="101600" marT="50800" marB="50800" anchor="ctr">
+                    <a:lnL w="0" cap="flat" cmpd="sng" algn="ctr">
+                      <a:noFill/>
+                    </a:lnL>
+                    <a:lnR w="0" cap="flat" cmpd="sng" algn="ctr">
+                      <a:noFill/>
+                    </a:lnR>
+                    <a:lnT w="0" cap="flat" cmpd="sng" algn="ctr">
+                      <a:noFill/>
+                    </a:lnT>
+                    <a:lnB w="0" cap="flat" cmpd="sng" algn="ctr">
+                      <a:noFill/>
+                    </a:lnB>
+                    <a:solidFill>
+                      <a:srgbClr val="FFFFFF"/>
+                    </a:solidFill>
+                  </a:tcPr>
+                </a:tc>
+                <a:tc>
+                  <a:txBody>
+                    <a:bodyPr/>
+                    <a:lstStyle/>
+                    <a:p>
+                      <a:pPr indent="0" marL="0">
+                        <a:buNone/>
+                      </a:pPr>
+                      <a:r>
+                        <a:rPr lang="en-US" sz="1100" dirty="0">
+                          <a:solidFill>
+                            <a:srgbClr val="17282A"/>
+                          </a:solidFill>
+                        </a:rPr>
+                        <a:t>2026-07-29</a:t>
+                      </a:r>
+                      <a:endParaRPr lang="en-US" sz="1100" dirty="0"/>
+                    </a:p>
+                  </a:txBody>
+                  <a:tcPr marL="101600" marR="101600" marT="50800" marB="50800" anchor="ctr">
+                    <a:lnL w="0" cap="flat" cmpd="sng" algn="ctr">
+                      <a:noFill/>
+                    </a:lnL>
+                    <a:lnR w="0" cap="flat" cmpd="sng" algn="ctr">
+                      <a:noFill/>
+                    </a:lnR>
+                    <a:lnT w="0" cap="flat" cmpd="sng" algn="ctr">
+                      <a:noFill/>
+                    </a:lnT>
+                    <a:lnB w="0" cap="flat" cmpd="sng" algn="ctr">
+                      <a:noFill/>
+                    </a:lnB>
+                    <a:solidFill>
+                      <a:srgbClr val="FFFFFF"/>
+                    </a:solidFill>
+                  </a:tcPr>
+                </a:tc>
+                <a:tc>
+                  <a:txBody>
+                    <a:bodyPr/>
+                    <a:lstStyle/>
+                    <a:p>
+                      <a:pPr indent="0" marL="0">
+                        <a:buNone/>
+                      </a:pPr>
+                      <a:r>
+                        <a:rPr lang="en-US" sz="1100" dirty="0">
+                          <a:solidFill>
+                            <a:srgbClr val="17282A"/>
+                          </a:solidFill>
+                        </a:rPr>
+                        <a:t>샌드박스 네트워크 제한으로 실행 미검증(구현 완료)</a:t>
+                      </a:r>
+                      <a:endParaRPr lang="en-US" sz="1100" dirty="0"/>
+                    </a:p>
+                  </a:txBody>
+                  <a:tcPr marL="101600" marR="101600" marT="50800" marB="50800" anchor="ctr">
+                    <a:lnL w="0" cap="flat" cmpd="sng" algn="ctr">
+                      <a:noFill/>
+                    </a:lnL>
+                    <a:lnR w="0" cap="flat" cmpd="sng" algn="ctr">
+                      <a:noFill/>
+                    </a:lnR>
+                    <a:lnT w="0" cap="flat" cmpd="sng" algn="ctr">
+                      <a:noFill/>
+                    </a:lnT>
+                    <a:lnB w="0" cap="flat" cmpd="sng" algn="ctr">
+                      <a:noFill/>
+                    </a:lnB>
+                    <a:solidFill>
+                      <a:srgbClr val="FFFFFF"/>
+                    </a:solidFill>
+                  </a:tcPr>
+                </a:tc>
+              </a:tr>
+              <a:tr h="497840">
+                <a:tc>
+                  <a:txBody>
+                    <a:bodyPr/>
+                    <a:lstStyle/>
+                    <a:p>
+                      <a:pPr indent="0" marL="0">
+                        <a:buNone/>
+                      </a:pPr>
+                      <a:r>
+                        <a:rPr lang="en-US" sz="1100" dirty="0">
+                          <a:solidFill>
+                            <a:srgbClr val="17282A"/>
+                          </a:solidFill>
+                        </a:rPr>
+                        <a:t>골프장 목록 조회</a:t>
+                      </a:r>
+                      <a:endParaRPr lang="en-US" sz="1100" dirty="0"/>
+                    </a:p>
+                  </a:txBody>
+                  <a:tcPr marL="101600" marR="101600" marT="50800" marB="50800" anchor="ctr">
+                    <a:lnL w="0" cap="flat" cmpd="sng" algn="ctr">
+                      <a:noFill/>
+                    </a:lnL>
+                    <a:lnR w="0" cap="flat" cmpd="sng" algn="ctr">
+                      <a:noFill/>
+                    </a:lnR>
+                    <a:lnT w="0" cap="flat" cmpd="sng" algn="ctr">
+                      <a:noFill/>
+                    </a:lnT>
+                    <a:lnB w="0" cap="flat" cmpd="sng" algn="ctr">
+                      <a:noFill/>
+                    </a:lnB>
+                    <a:solidFill>
+                      <a:srgbClr val="F2F7F7"/>
+                    </a:solidFill>
+                  </a:tcPr>
+                </a:tc>
+                <a:tc>
+                  <a:txBody>
+                    <a:bodyPr/>
+                    <a:lstStyle/>
+                    <a:p>
+                      <a:pPr indent="0" marL="0">
+                        <a:buNone/>
+                      </a:pPr>
+                      <a:r>
+                        <a:rPr lang="en-US" sz="1100" dirty="0">
+                          <a:solidFill>
+                            <a:srgbClr val="17282A"/>
+                          </a:solidFill>
+                        </a:rPr>
+                        <a:t>e2e/courses.spec.ts</a:t>
+                      </a:r>
+                      <a:endParaRPr lang="en-US" sz="1100" dirty="0"/>
+                    </a:p>
+                  </a:txBody>
+                  <a:tcPr marL="101600" marR="101600" marT="50800" marB="50800" anchor="ctr">
+                    <a:lnL w="0" cap="flat" cmpd="sng" algn="ctr">
+                      <a:noFill/>
+                    </a:lnL>
+                    <a:lnR w="0" cap="flat" cmpd="sng" algn="ctr">
+                      <a:noFill/>
+                    </a:lnR>
+                    <a:lnT w="0" cap="flat" cmpd="sng" algn="ctr">
+                      <a:noFill/>
+                    </a:lnT>
+                    <a:lnB w="0" cap="flat" cmpd="sng" algn="ctr">
+                      <a:noFill/>
+                    </a:lnB>
+                    <a:solidFill>
+                      <a:srgbClr val="F2F7F7"/>
+                    </a:solidFill>
+                  </a:tcPr>
+                </a:tc>
+                <a:tc>
+                  <a:txBody>
+                    <a:bodyPr/>
+                    <a:lstStyle/>
+                    <a:p>
+                      <a:pPr indent="0" marL="0">
+                        <a:buNone/>
+                      </a:pPr>
+                      <a:r>
+                        <a:rPr lang="en-US" sz="1100" b="1" dirty="0">
+                          <a:solidFill>
+                            <a:srgbClr val="0B5C63"/>
+                          </a:solidFill>
+                        </a:rPr>
+                        <a:t>작성완료</a:t>
+                      </a:r>
+                      <a:endParaRPr lang="en-US" sz="1100" dirty="0"/>
+                    </a:p>
+                  </a:txBody>
+                  <a:tcPr marL="101600" marR="101600" marT="50800" marB="50800" anchor="ctr">
+                    <a:lnL w="0" cap="flat" cmpd="sng" algn="ctr">
+                      <a:noFill/>
+                    </a:lnL>
+                    <a:lnR w="0" cap="flat" cmpd="sng" algn="ctr">
+                      <a:noFill/>
+                    </a:lnR>
+                    <a:lnT w="0" cap="flat" cmpd="sng" algn="ctr">
+                      <a:noFill/>
+                    </a:lnT>
+                    <a:lnB w="0" cap="flat" cmpd="sng" algn="ctr">
+                      <a:noFill/>
+                    </a:lnB>
+                    <a:solidFill>
+                      <a:srgbClr val="F2F7F7"/>
+                    </a:solidFill>
+                  </a:tcPr>
+                </a:tc>
+                <a:tc>
+                  <a:txBody>
+                    <a:bodyPr/>
+                    <a:lstStyle/>
+                    <a:p>
+                      <a:pPr indent="0" marL="0">
+                        <a:buNone/>
+                      </a:pPr>
+                      <a:r>
+                        <a:rPr lang="en-US" sz="1100" dirty="0">
+                          <a:solidFill>
+                            <a:srgbClr val="17282A"/>
+                          </a:solidFill>
+                        </a:rPr>
+                        <a:t>2026-07-29</a:t>
+                      </a:r>
+                      <a:endParaRPr lang="en-US" sz="1100" dirty="0"/>
+                    </a:p>
+                  </a:txBody>
+                  <a:tcPr marL="101600" marR="101600" marT="50800" marB="50800" anchor="ctr">
+                    <a:lnL w="0" cap="flat" cmpd="sng" algn="ctr">
+                      <a:noFill/>
+                    </a:lnL>
+                    <a:lnR w="0" cap="flat" cmpd="sng" algn="ctr">
+                      <a:noFill/>
+                    </a:lnR>
+                    <a:lnT w="0" cap="flat" cmpd="sng" algn="ctr">
+                      <a:noFill/>
+                    </a:lnT>
+                    <a:lnB w="0" cap="flat" cmpd="sng" algn="ctr">
+                      <a:noFill/>
+                    </a:lnB>
+                    <a:solidFill>
+                      <a:srgbClr val="F2F7F7"/>
+                    </a:solidFill>
+                  </a:tcPr>
+                </a:tc>
+                <a:tc>
+                  <a:txBody>
+                    <a:bodyPr/>
+                    <a:lstStyle/>
+                    <a:p>
+                      <a:pPr indent="0" marL="0">
+                        <a:buNone/>
+                      </a:pPr>
+                      <a:r>
+                        <a:rPr lang="en-US" sz="1100" dirty="0">
+                          <a:solidFill>
+                            <a:srgbClr val="17282A"/>
+                          </a:solidFill>
+                        </a:rPr>
+                        <a:t>샌드박스 네트워크 제한으로 실행 미검증(구현 완료)</a:t>
+                      </a:r>
+                      <a:endParaRPr lang="en-US" sz="1100" dirty="0"/>
+                    </a:p>
+                  </a:txBody>
+                  <a:tcPr marL="101600" marR="101600" marT="50800" marB="50800" anchor="ctr">
+                    <a:lnL w="0" cap="flat" cmpd="sng" algn="ctr">
+                      <a:noFill/>
+                    </a:lnL>
+                    <a:lnR w="0" cap="flat" cmpd="sng" algn="ctr">
+                      <a:noFill/>
+                    </a:lnR>
+                    <a:lnT w="0" cap="flat" cmpd="sng" algn="ctr">
+                      <a:noFill/>
+                    </a:lnT>
+                    <a:lnB w="0" cap="flat" cmpd="sng" algn="ctr">
+                      <a:noFill/>
+                    </a:lnB>
+                    <a:solidFill>
+                      <a:srgbClr val="F2F7F7"/>
+                    </a:solidFill>
+                  </a:tcPr>
+                </a:tc>
+              </a:tr>
+              <a:tr h="497840">
+                <a:tc>
+                  <a:txBody>
+                    <a:bodyPr/>
+                    <a:lstStyle/>
+                    <a:p>
+                      <a:pPr indent="0" marL="0">
+                        <a:buNone/>
+                      </a:pPr>
+                      <a:r>
+                        <a:rPr lang="en-US" sz="1100" dirty="0">
+                          <a:solidFill>
+                            <a:srgbClr val="17282A"/>
+                          </a:solidFill>
+                        </a:rPr>
+                        <a:t>라운드 등록 2-Step</a:t>
+                      </a:r>
+                      <a:endParaRPr lang="en-US" sz="1100" dirty="0"/>
+                    </a:p>
+                  </a:txBody>
+                  <a:tcPr marL="101600" marR="101600" marT="50800" marB="50800" anchor="ctr">
+                    <a:lnL w="0" cap="flat" cmpd="sng" algn="ctr">
+                      <a:noFill/>
+                    </a:lnL>
+                    <a:lnR w="0" cap="flat" cmpd="sng" algn="ctr">
+                      <a:noFill/>
+                    </a:lnR>
+                    <a:lnT w="0" cap="flat" cmpd="sng" algn="ctr">
+                      <a:noFill/>
+                    </a:lnT>
+                    <a:lnB w="0" cap="flat" cmpd="sng" algn="ctr">
+                      <a:noFill/>
+                    </a:lnB>
+                    <a:solidFill>
+                      <a:srgbClr val="FFFFFF"/>
+                    </a:solidFill>
+                  </a:tcPr>
+                </a:tc>
+                <a:tc>
+                  <a:txBody>
+                    <a:bodyPr/>
+                    <a:lstStyle/>
+                    <a:p>
+                      <a:pPr indent="0" marL="0">
+                        <a:buNone/>
+                      </a:pPr>
+                      <a:r>
+                        <a:rPr lang="en-US" sz="1100" dirty="0">
+                          <a:solidFill>
+                            <a:srgbClr val="17282A"/>
+                          </a:solidFill>
+                        </a:rPr>
+                        <a:t>e2e/rounds-new.spec.ts</a:t>
+                      </a:r>
+                      <a:endParaRPr lang="en-US" sz="1100" dirty="0"/>
+                    </a:p>
+                  </a:txBody>
+                  <a:tcPr marL="101600" marR="101600" marT="50800" marB="50800" anchor="ctr">
+                    <a:lnL w="0" cap="flat" cmpd="sng" algn="ctr">
+                      <a:noFill/>
+                    </a:lnL>
+                    <a:lnR w="0" cap="flat" cmpd="sng" algn="ctr">
+                      <a:noFill/>
+                    </a:lnR>
+                    <a:lnT w="0" cap="flat" cmpd="sng" algn="ctr">
+                      <a:noFill/>
+                    </a:lnT>
+                    <a:lnB w="0" cap="flat" cmpd="sng" algn="ctr">
+                      <a:noFill/>
+                    </a:lnB>
+                    <a:solidFill>
+                      <a:srgbClr val="FFFFFF"/>
+                    </a:solidFill>
+                  </a:tcPr>
+                </a:tc>
+                <a:tc>
+                  <a:txBody>
+                    <a:bodyPr/>
+                    <a:lstStyle/>
+                    <a:p>
+                      <a:pPr indent="0" marL="0">
+                        <a:buNone/>
+                      </a:pPr>
+                      <a:r>
+                        <a:rPr lang="en-US" sz="1100" b="1" dirty="0">
+                          <a:solidFill>
+                            <a:srgbClr val="0B5C63"/>
+                          </a:solidFill>
+                        </a:rPr>
+                        <a:t>작성완료</a:t>
+                      </a:r>
+                      <a:endParaRPr lang="en-US" sz="1100" dirty="0"/>
+                    </a:p>
+                  </a:txBody>
+                  <a:tcPr marL="101600" marR="101600" marT="50800" marB="50800" anchor="ctr">
+                    <a:lnL w="0" cap="flat" cmpd="sng" algn="ctr">
+                      <a:noFill/>
+                    </a:lnL>
+                    <a:lnR w="0" cap="flat" cmpd="sng" algn="ctr">
+                      <a:noFill/>
+                    </a:lnR>
+                    <a:lnT w="0" cap="flat" cmpd="sng" algn="ctr">
+                      <a:noFill/>
+                    </a:lnT>
+                    <a:lnB w="0" cap="flat" cmpd="sng" algn="ctr">
+                      <a:noFill/>
+                    </a:lnB>
+                    <a:solidFill>
+                      <a:srgbClr val="FFFFFF"/>
+                    </a:solidFill>
+                  </a:tcPr>
+                </a:tc>
+                <a:tc>
+                  <a:txBody>
+                    <a:bodyPr/>
+                    <a:lstStyle/>
+                    <a:p>
+                      <a:pPr indent="0" marL="0">
+                        <a:buNone/>
+                      </a:pPr>
+                      <a:r>
+                        <a:rPr lang="en-US" sz="1100" dirty="0">
+                          <a:solidFill>
+                            <a:srgbClr val="17282A"/>
+                          </a:solidFill>
+                        </a:rPr>
+                        <a:t>2026-07-29</a:t>
+                      </a:r>
+                      <a:endParaRPr lang="en-US" sz="1100" dirty="0"/>
+                    </a:p>
+                  </a:txBody>
+                  <a:tcPr marL="101600" marR="101600" marT="50800" marB="50800" anchor="ctr">
+                    <a:lnL w="0" cap="flat" cmpd="sng" algn="ctr">
+                      <a:noFill/>
+                    </a:lnL>
+                    <a:lnR w="0" cap="flat" cmpd="sng" algn="ctr">
+                      <a:noFill/>
+                    </a:lnR>
+                    <a:lnT w="0" cap="flat" cmpd="sng" algn="ctr">
+                      <a:noFill/>
+                    </a:lnT>
+                    <a:lnB w="0" cap="flat" cmpd="sng" algn="ctr">
+                      <a:noFill/>
+                    </a:lnB>
+                    <a:solidFill>
+                      <a:srgbClr val="FFFFFF"/>
+                    </a:solidFill>
+                  </a:tcPr>
+                </a:tc>
+                <a:tc>
+                  <a:txBody>
+                    <a:bodyPr/>
+                    <a:lstStyle/>
+                    <a:p>
+                      <a:pPr indent="0" marL="0">
+                        <a:buNone/>
+                      </a:pPr>
+                      <a:r>
+                        <a:rPr lang="en-US" sz="1100" dirty="0">
+                          <a:solidFill>
+                            <a:srgbClr val="17282A"/>
+                          </a:solidFill>
+                        </a:rPr>
+                        <a:t>샌드박스 네트워크 제한으로 실행 미검증(구현 완료)</a:t>
+                      </a:r>
+                      <a:endParaRPr lang="en-US" sz="1100" dirty="0"/>
+                    </a:p>
+                  </a:txBody>
+                  <a:tcPr marL="101600" marR="101600" marT="50800" marB="50800" anchor="ctr">
+                    <a:lnL w="0" cap="flat" cmpd="sng" algn="ctr">
+                      <a:noFill/>
+                    </a:lnL>
+                    <a:lnR w="0" cap="flat" cmpd="sng" algn="ctr">
+                      <a:noFill/>
+                    </a:lnR>
+                    <a:lnT w="0" cap="flat" cmpd="sng" algn="ctr">
+                      <a:noFill/>
+                    </a:lnT>
+                    <a:lnB w="0" cap="flat" cmpd="sng" algn="ctr">
+                      <a:noFill/>
+                    </a:lnB>
+                    <a:solidFill>
+                      <a:srgbClr val="FFFFFF"/>
+                    </a:solidFill>
+                  </a:tcPr>
+                </a:tc>
+              </a:tr>
+              <a:tr h="497840">
+                <a:tc>
+                  <a:txBody>
+                    <a:bodyPr/>
+                    <a:lstStyle/>
+                    <a:p>
+                      <a:pPr indent="0" marL="0">
+                        <a:buNone/>
+                      </a:pPr>
+                      <a:r>
+                        <a:rPr lang="en-US" sz="1100" dirty="0">
+                          <a:solidFill>
+                            <a:srgbClr val="17282A"/>
+                          </a:solidFill>
+                        </a:rPr>
+                        <a:t>라운드 상세·삭제</a:t>
+                      </a:r>
+                      <a:endParaRPr lang="en-US" sz="1100" dirty="0"/>
+                    </a:p>
+                  </a:txBody>
+                  <a:tcPr marL="101600" marR="101600" marT="50800" marB="50800" anchor="ctr">
+                    <a:lnL w="0" cap="flat" cmpd="sng" algn="ctr">
+                      <a:noFill/>
+                    </a:lnL>
+                    <a:lnR w="0" cap="flat" cmpd="sng" algn="ctr">
+                      <a:noFill/>
+                    </a:lnR>
+                    <a:lnT w="0" cap="flat" cmpd="sng" algn="ctr">
+                      <a:noFill/>
+                    </a:lnT>
+                    <a:lnB w="0" cap="flat" cmpd="sng" algn="ctr">
+                      <a:noFill/>
+                    </a:lnB>
+                    <a:solidFill>
+                      <a:srgbClr val="F2F7F7"/>
+                    </a:solidFill>
+                  </a:tcPr>
+                </a:tc>
+                <a:tc>
+                  <a:txBody>
+                    <a:bodyPr/>
+                    <a:lstStyle/>
+                    <a:p>
+                      <a:pPr indent="0" marL="0">
+                        <a:buNone/>
+                      </a:pPr>
+                      <a:r>
+                        <a:rPr lang="en-US" sz="1100" dirty="0">
+                          <a:solidFill>
+                            <a:srgbClr val="17282A"/>
+                          </a:solidFill>
+                        </a:rPr>
+                        <a:t>e2e/rounds-delete.spec.ts</a:t>
+                      </a:r>
+                      <a:endParaRPr lang="en-US" sz="1100" dirty="0"/>
+                    </a:p>
+                  </a:txBody>
+                  <a:tcPr marL="101600" marR="101600" marT="50800" marB="50800" anchor="ctr">
+                    <a:lnL w="0" cap="flat" cmpd="sng" algn="ctr">
+                      <a:noFill/>
+                    </a:lnL>
+                    <a:lnR w="0" cap="flat" cmpd="sng" algn="ctr">
+                      <a:noFill/>
+                    </a:lnR>
+                    <a:lnT w="0" cap="flat" cmpd="sng" algn="ctr">
+                      <a:noFill/>
+                    </a:lnT>
+                    <a:lnB w="0" cap="flat" cmpd="sng" algn="ctr">
+                      <a:noFill/>
+                    </a:lnB>
+                    <a:solidFill>
+                      <a:srgbClr val="F2F7F7"/>
+                    </a:solidFill>
+                  </a:tcPr>
+                </a:tc>
+                <a:tc>
+                  <a:txBody>
+                    <a:bodyPr/>
+                    <a:lstStyle/>
+                    <a:p>
+                      <a:pPr indent="0" marL="0">
+                        <a:buNone/>
+                      </a:pPr>
+                      <a:r>
+                        <a:rPr lang="en-US" sz="1100" b="1" dirty="0">
+                          <a:solidFill>
+                            <a:srgbClr val="0B5C63"/>
+                          </a:solidFill>
+                        </a:rPr>
+                        <a:t>작성완료</a:t>
+                      </a:r>
+                      <a:endParaRPr lang="en-US" sz="1100" dirty="0"/>
+                    </a:p>
+                  </a:txBody>
+                  <a:tcPr marL="101600" marR="101600" marT="50800" marB="50800" anchor="ctr">
+                    <a:lnL w="0" cap="flat" cmpd="sng" algn="ctr">
+                      <a:noFill/>
+                    </a:lnL>
+                    <a:lnR w="0" cap="flat" cmpd="sng" algn="ctr">
+                      <a:noFill/>
+                    </a:lnR>
+                    <a:lnT w="0" cap="flat" cmpd="sng" algn="ctr">
+                      <a:noFill/>
+                    </a:lnT>
+                    <a:lnB w="0" cap="flat" cmpd="sng" algn="ctr">
+                      <a:noFill/>
+                    </a:lnB>
+                    <a:solidFill>
+                      <a:srgbClr val="F2F7F7"/>
+                    </a:solidFill>
+                  </a:tcPr>
+                </a:tc>
+                <a:tc>
+                  <a:txBody>
+                    <a:bodyPr/>
+                    <a:lstStyle/>
+                    <a:p>
+                      <a:pPr indent="0" marL="0">
+                        <a:buNone/>
+                      </a:pPr>
+                      <a:r>
+                        <a:rPr lang="en-US" sz="1100" dirty="0">
+                          <a:solidFill>
+                            <a:srgbClr val="17282A"/>
+                          </a:solidFill>
+                        </a:rPr>
+                        <a:t>2026-07-29</a:t>
+                      </a:r>
+                      <a:endParaRPr lang="en-US" sz="1100" dirty="0"/>
+                    </a:p>
+                  </a:txBody>
+                  <a:tcPr marL="101600" marR="101600" marT="50800" marB="50800" anchor="ctr">
+                    <a:lnL w="0" cap="flat" cmpd="sng" algn="ctr">
+                      <a:noFill/>
+                    </a:lnL>
+                    <a:lnR w="0" cap="flat" cmpd="sng" algn="ctr">
+                      <a:noFill/>
+                    </a:lnR>
+                    <a:lnT w="0" cap="flat" cmpd="sng" algn="ctr">
+                      <a:noFill/>
+                    </a:lnT>
+                    <a:lnB w="0" cap="flat" cmpd="sng" algn="ctr">
+                      <a:noFill/>
+                    </a:lnB>
+                    <a:solidFill>
+                      <a:srgbClr val="F2F7F7"/>
+                    </a:solidFill>
+                  </a:tcPr>
+                </a:tc>
+                <a:tc>
+                  <a:txBody>
+                    <a:bodyPr/>
+                    <a:lstStyle/>
+                    <a:p>
+                      <a:pPr indent="0" marL="0">
+                        <a:buNone/>
+                      </a:pPr>
+                      <a:r>
+                        <a:rPr lang="en-US" sz="1100" dirty="0">
+                          <a:solidFill>
+                            <a:srgbClr val="17282A"/>
+                          </a:solidFill>
+                        </a:rPr>
+                        <a:t>샌드박스 네트워크 제한으로 실행 미검증(구현 완료)</a:t>
+                      </a:r>
+                      <a:endParaRPr lang="en-US" sz="1100" dirty="0"/>
+                    </a:p>
+                  </a:txBody>
+                  <a:tcPr marL="101600" marR="101600" marT="50800" marB="50800" anchor="ctr">
+                    <a:lnL w="0" cap="flat" cmpd="sng" algn="ctr">
+                      <a:noFill/>
+                    </a:lnL>
+                    <a:lnR w="0" cap="flat" cmpd="sng" algn="ctr">
+                      <a:noFill/>
+                    </a:lnR>
+                    <a:lnT w="0" cap="flat" cmpd="sng" algn="ctr">
+                      <a:noFill/>
+                    </a:lnT>
+                    <a:lnB w="0" cap="flat" cmpd="sng" algn="ctr">
+                      <a:noFill/>
+                    </a:lnB>
+                    <a:solidFill>
+                      <a:srgbClr val="F2F7F7"/>
+                    </a:solidFill>
+                  </a:tcPr>
+                </a:tc>
+              </a:tr>
+              <a:tr h="497840">
+                <a:tc>
+                  <a:txBody>
+                    <a:bodyPr/>
+                    <a:lstStyle/>
+                    <a:p>
+                      <a:pPr indent="0" marL="0">
+                        <a:buNone/>
+                      </a:pPr>
+                      <a:r>
+                        <a:rPr lang="en-US" sz="1100" dirty="0">
+                          <a:solidFill>
+                            <a:srgbClr val="17282A"/>
+                          </a:solidFill>
+                        </a:rPr>
+                        <a:t>관리자: 루프·Par 관리</a:t>
+                      </a:r>
+                      <a:endParaRPr lang="en-US" sz="1100" dirty="0"/>
+                    </a:p>
+                  </a:txBody>
+                  <a:tcPr marL="101600" marR="101600" marT="50800" marB="50800" anchor="ctr">
+                    <a:lnL w="0" cap="flat" cmpd="sng" algn="ctr">
+                      <a:noFill/>
+                    </a:lnL>
+                    <a:lnR w="0" cap="flat" cmpd="sng" algn="ctr">
+                      <a:noFill/>
+                    </a:lnR>
+                    <a:lnT w="0" cap="flat" cmpd="sng" algn="ctr">
+                      <a:noFill/>
+                    </a:lnT>
+                    <a:lnB w="0" cap="flat" cmpd="sng" algn="ctr">
+                      <a:noFill/>
+                    </a:lnB>
+                    <a:solidFill>
+                      <a:srgbClr val="FFFFFF"/>
+                    </a:solidFill>
+                  </a:tcPr>
+                </a:tc>
+                <a:tc>
+                  <a:txBody>
+                    <a:bodyPr/>
+                    <a:lstStyle/>
+                    <a:p>
+                      <a:pPr indent="0" marL="0">
+                        <a:buNone/>
+                      </a:pPr>
+                      <a:r>
+                        <a:rPr lang="en-US" sz="1100" dirty="0">
+                          <a:solidFill>
+                            <a:srgbClr val="17282A"/>
+                          </a:solidFill>
+                        </a:rPr>
+                        <a:t>e2e/admin-loop-par.spec.ts</a:t>
+                      </a:r>
+                      <a:endParaRPr lang="en-US" sz="1100" dirty="0"/>
+                    </a:p>
+                  </a:txBody>
+                  <a:tcPr marL="101600" marR="101600" marT="50800" marB="50800" anchor="ctr">
+                    <a:lnL w="0" cap="flat" cmpd="sng" algn="ctr">
+                      <a:noFill/>
+                    </a:lnL>
+                    <a:lnR w="0" cap="flat" cmpd="sng" algn="ctr">
+                      <a:noFill/>
+                    </a:lnR>
+                    <a:lnT w="0" cap="flat" cmpd="sng" algn="ctr">
+                      <a:noFill/>
+                    </a:lnT>
+                    <a:lnB w="0" cap="flat" cmpd="sng" algn="ctr">
+                      <a:noFill/>
+                    </a:lnB>
+                    <a:solidFill>
+                      <a:srgbClr val="FFFFFF"/>
+                    </a:solidFill>
+                  </a:tcPr>
+                </a:tc>
+                <a:tc>
+                  <a:txBody>
+                    <a:bodyPr/>
+                    <a:lstStyle/>
+                    <a:p>
+                      <a:pPr indent="0" marL="0">
+                        <a:buNone/>
+                      </a:pPr>
+                      <a:r>
+                        <a:rPr lang="en-US" sz="1100" b="1" dirty="0">
+                          <a:solidFill>
                             <a:srgbClr val="8A9A9C"/>
                           </a:solidFill>
                         </a:rPr>
@@ -4132,7 +4880,7 @@
                             <a:srgbClr val="17282A"/>
                           </a:solidFill>
                         </a:rPr>
-                        <a:t>테스트 전용 로그인 경로 필요</a:t>
+                        <a:t>관리자 role 세팅 필요</a:t>
                       </a:r>
                       <a:endParaRPr lang="en-US" sz="1100" dirty="0"/>
                     </a:p>
@@ -4156,7 +4904,7 @@
                   </a:tcPr>
                 </a:tc>
               </a:tr>
-              <a:tr h="746760">
+              <a:tr h="497840">
                 <a:tc>
                   <a:txBody>
                     <a:bodyPr/>
@@ -4171,7 +4919,7 @@
                             <a:srgbClr val="17282A"/>
                           </a:solidFill>
                         </a:rPr>
-                        <a:t>라운드 등록 2-Step</a:t>
+                        <a:t>관리자: CSV 업로드</a:t>
                       </a:r>
                       <a:endParaRPr lang="en-US" sz="1100" dirty="0"/>
                     </a:p>
@@ -4208,7 +4956,7 @@
                             <a:srgbClr val="17282A"/>
                           </a:solidFill>
                         </a:rPr>
-                        <a:t>e2e/round-create.spec.ts</a:t>
+                        <a:t>e2e/admin-upload.spec.ts</a:t>
                       </a:r>
                       <a:endParaRPr lang="en-US" sz="1100" dirty="0"/>
                     </a:p>
@@ -4319,7 +5067,7 @@
                             <a:srgbClr val="17282A"/>
                           </a:solidFill>
                         </a:rPr>
-                        <a:t>Supabase 연결 후 착수</a:t>
+                        <a:t>관리자 role 세팅 필요</a:t>
                       </a:r>
                       <a:endParaRPr lang="en-US" sz="1100" dirty="0"/>
                     </a:p>
@@ -4343,7 +5091,7 @@
                   </a:tcPr>
                 </a:tc>
               </a:tr>
-              <a:tr h="746760">
+              <a:tr h="497840">
                 <a:tc>
                   <a:txBody>
                     <a:bodyPr/>
@@ -4358,7 +5106,7 @@
                             <a:srgbClr val="17282A"/>
                           </a:solidFill>
                         </a:rPr>
-                        <a:t>라운드 상세·삭제</a:t>
+                        <a:t>관리자: 공공데이터 동기화</a:t>
                       </a:r>
                       <a:endParaRPr lang="en-US" sz="1100" dirty="0"/>
                     </a:p>
@@ -4395,7 +5143,7 @@
                             <a:srgbClr val="17282A"/>
                           </a:solidFill>
                         </a:rPr>
-                        <a:t>e2e/round-delete.spec.ts</a:t>
+                        <a:t>e2e/admin-sync.spec.ts</a:t>
                       </a:r>
                       <a:endParaRPr lang="en-US" sz="1100" dirty="0"/>
                     </a:p>
@@ -4506,7 +5254,7 @@
                             <a:srgbClr val="17282A"/>
                           </a:solidFill>
                         </a:rPr>
-                        <a:t>-</a:t>
+                        <a:t>외부 API 목 서버 권장</a:t>
                       </a:r>
                       <a:endParaRPr lang="en-US" sz="1100" dirty="0"/>
                     </a:p>
@@ -4530,7 +5278,7 @@
                   </a:tcPr>
                 </a:tc>
               </a:tr>
-              <a:tr h="746760">
+              <a:tr h="497840">
                 <a:tc>
                   <a:txBody>
                     <a:bodyPr/>
@@ -4545,7 +5293,7 @@
                             <a:srgbClr val="17282A"/>
                           </a:solidFill>
                         </a:rPr>
-                        <a:t>관리자 CSV 업로드</a:t>
+                        <a:t>관리자: 지오코딩 실행</a:t>
                       </a:r>
                       <a:endParaRPr lang="en-US" sz="1100" dirty="0"/>
                     </a:p>
@@ -4582,7 +5330,7 @@
                             <a:srgbClr val="17282A"/>
                           </a:solidFill>
                         </a:rPr>
-                        <a:t>e2e/admin-upload.spec.ts</a:t>
+                        <a:t>e2e/admin-geocode.spec.ts</a:t>
                       </a:r>
                       <a:endParaRPr lang="en-US" sz="1100" dirty="0"/>
                     </a:p>
@@ -4693,7 +5441,7 @@
                             <a:srgbClr val="17282A"/>
                           </a:solidFill>
                         </a:rPr>
-                        <a:t>-</a:t>
+                        <a:t>카카오 API 목 처리 권장</a:t>
                       </a:r>
                       <a:endParaRPr lang="en-US" sz="1100" dirty="0"/>
                     </a:p>
@@ -4713,193 +5461,6 @@
                     </a:lnB>
                     <a:solidFill>
                       <a:srgbClr val="F2F7F7"/>
-                    </a:solidFill>
-                  </a:tcPr>
-                </a:tc>
-              </a:tr>
-              <a:tr h="746760">
-                <a:tc>
-                  <a:txBody>
-                    <a:bodyPr/>
-                    <a:lstStyle/>
-                    <a:p>
-                      <a:pPr indent="0" marL="0">
-                        <a:buNone/>
-                      </a:pPr>
-                      <a:r>
-                        <a:rPr lang="en-US" sz="1100" dirty="0">
-                          <a:solidFill>
-                            <a:srgbClr val="17282A"/>
-                          </a:solidFill>
-                        </a:rPr>
-                        <a:t>관리자 공공데이터 동기화</a:t>
-                      </a:r>
-                      <a:endParaRPr lang="en-US" sz="1100" dirty="0"/>
-                    </a:p>
-                  </a:txBody>
-                  <a:tcPr marL="101600" marR="101600" marT="50800" marB="50800" anchor="ctr">
-                    <a:lnL w="0" cap="flat" cmpd="sng" algn="ctr">
-                      <a:noFill/>
-                    </a:lnL>
-                    <a:lnR w="0" cap="flat" cmpd="sng" algn="ctr">
-                      <a:noFill/>
-                    </a:lnR>
-                    <a:lnT w="0" cap="flat" cmpd="sng" algn="ctr">
-                      <a:noFill/>
-                    </a:lnT>
-                    <a:lnB w="0" cap="flat" cmpd="sng" algn="ctr">
-                      <a:noFill/>
-                    </a:lnB>
-                    <a:solidFill>
-                      <a:srgbClr val="FFFFFF"/>
-                    </a:solidFill>
-                  </a:tcPr>
-                </a:tc>
-                <a:tc>
-                  <a:txBody>
-                    <a:bodyPr/>
-                    <a:lstStyle/>
-                    <a:p>
-                      <a:pPr indent="0" marL="0">
-                        <a:buNone/>
-                      </a:pPr>
-                      <a:r>
-                        <a:rPr lang="en-US" sz="1100" dirty="0">
-                          <a:solidFill>
-                            <a:srgbClr val="17282A"/>
-                          </a:solidFill>
-                        </a:rPr>
-                        <a:t>e2e/admin-sync.spec.ts</a:t>
-                      </a:r>
-                      <a:endParaRPr lang="en-US" sz="1100" dirty="0"/>
-                    </a:p>
-                  </a:txBody>
-                  <a:tcPr marL="101600" marR="101600" marT="50800" marB="50800" anchor="ctr">
-                    <a:lnL w="0" cap="flat" cmpd="sng" algn="ctr">
-                      <a:noFill/>
-                    </a:lnL>
-                    <a:lnR w="0" cap="flat" cmpd="sng" algn="ctr">
-                      <a:noFill/>
-                    </a:lnR>
-                    <a:lnT w="0" cap="flat" cmpd="sng" algn="ctr">
-                      <a:noFill/>
-                    </a:lnT>
-                    <a:lnB w="0" cap="flat" cmpd="sng" algn="ctr">
-                      <a:noFill/>
-                    </a:lnB>
-                    <a:solidFill>
-                      <a:srgbClr val="FFFFFF"/>
-                    </a:solidFill>
-                  </a:tcPr>
-                </a:tc>
-                <a:tc>
-                  <a:txBody>
-                    <a:bodyPr/>
-                    <a:lstStyle/>
-                    <a:p>
-                      <a:pPr indent="0" marL="0">
-                        <a:buNone/>
-                      </a:pPr>
-                      <a:r>
-                        <a:rPr lang="en-US" sz="1100" b="1" dirty="0">
-                          <a:solidFill>
-                            <a:srgbClr val="8A9A9C"/>
-                          </a:solidFill>
-                        </a:rPr>
-                        <a:t>예정</a:t>
-                      </a:r>
-                      <a:endParaRPr lang="en-US" sz="1100" dirty="0"/>
-                    </a:p>
-                  </a:txBody>
-                  <a:tcPr marL="101600" marR="101600" marT="50800" marB="50800" anchor="ctr">
-                    <a:lnL w="0" cap="flat" cmpd="sng" algn="ctr">
-                      <a:noFill/>
-                    </a:lnL>
-                    <a:lnR w="0" cap="flat" cmpd="sng" algn="ctr">
-                      <a:noFill/>
-                    </a:lnR>
-                    <a:lnT w="0" cap="flat" cmpd="sng" algn="ctr">
-                      <a:noFill/>
-                    </a:lnT>
-                    <a:lnB w="0" cap="flat" cmpd="sng" algn="ctr">
-                      <a:noFill/>
-                    </a:lnB>
-                    <a:solidFill>
-                      <a:srgbClr val="FFFFFF"/>
-                    </a:solidFill>
-                  </a:tcPr>
-                </a:tc>
-                <a:tc>
-                  <a:txBody>
-                    <a:bodyPr/>
-                    <a:lstStyle/>
-                    <a:p>
-                      <a:pPr indent="0" marL="0">
-                        <a:buNone/>
-                      </a:pPr>
-                      <a:r>
-                        <a:rPr lang="en-US" sz="1100" dirty="0">
-                          <a:solidFill>
-                            <a:srgbClr val="17282A"/>
-                          </a:solidFill>
-                        </a:rPr>
-                        <a:t>-</a:t>
-                      </a:r>
-                      <a:endParaRPr lang="en-US" sz="1100" dirty="0"/>
-                    </a:p>
-                  </a:txBody>
-                  <a:tcPr marL="101600" marR="101600" marT="50800" marB="50800" anchor="ctr">
-                    <a:lnL w="0" cap="flat" cmpd="sng" algn="ctr">
-                      <a:noFill/>
-                    </a:lnL>
-                    <a:lnR w="0" cap="flat" cmpd="sng" algn="ctr">
-                      <a:noFill/>
-                    </a:lnR>
-                    <a:lnT w="0" cap="flat" cmpd="sng" algn="ctr">
-                      <a:noFill/>
-                    </a:lnT>
-                    <a:lnB w="0" cap="flat" cmpd="sng" algn="ctr">
-                      <a:noFill/>
-                    </a:lnB>
-                    <a:solidFill>
-                      <a:srgbClr val="FFFFFF"/>
-                    </a:solidFill>
-                  </a:tcPr>
-                </a:tc>
-                <a:tc>
-                  <a:txBody>
-                    <a:bodyPr/>
-                    <a:lstStyle/>
-                    <a:p>
-                      <a:pPr indent="0" marL="0">
-                        <a:buNone/>
-                      </a:pPr>
-                      <a:r>
-                        <a:rPr lang="en-US" sz="1100" dirty="0">
-                          <a:solidFill>
-                            <a:srgbClr val="17282A"/>
-                          </a:solidFill>
-                        </a:rPr>
-                        <a:t>외부 API 목 서버 권장</a:t>
-                      </a:r>
-                      <a:endParaRPr lang="en-US" sz="1100" dirty="0"/>
-                    </a:p>
-                  </a:txBody>
-                  <a:tcPr marL="101600" marR="101600" marT="50800" marB="50800" anchor="ctr">
-                    <a:lnL w="0" cap="flat" cmpd="sng" algn="ctr">
-                      <a:noFill/>
-                    </a:lnL>
-                    <a:lnR w="0" cap="flat" cmpd="sng" algn="ctr">
-                      <a:noFill/>
-                    </a:lnR>
-                    <a:lnT w="0" cap="flat" cmpd="sng" algn="ctr">
-                      <a:noFill/>
-                    </a:lnT>
-                    <a:lnB w="0" cap="flat" cmpd="sng" algn="ctr">
-                      <a:noFill/>
-                    </a:lnB>
-                    <a:solidFill>
-                      <a:srgbClr val="FFFFFF"/>
                     </a:solidFill>
                   </a:tcPr>
                 </a:tc>
@@ -9068,7 +9629,7 @@
                 <a:ea typeface="Calibri" pitchFamily="34" charset="-122"/>
                 <a:cs typeface="Calibri" pitchFamily="34" charset="-120"/>
               </a:rPr>
-              <a:t>Supabase DB 연결 필요 — Vitest와 달리 지금은 착수 불가</a:t>
+              <a:t>Supabase DB 연결 완료(2026-07-28) — 이제 착수 가능</a:t>
             </a:r>
             <a:endParaRPr lang="en-US" sz="1250" dirty="0"/>
           </a:p>
@@ -11002,7 +11563,7 @@
                 <a:ea typeface="Cambria" pitchFamily="34" charset="-122"/>
                 <a:cs typeface="Cambria" pitchFamily="34" charset="-120"/>
               </a:rPr>
-              <a:t>Vitest 셋업 + 우선 함수 테스트 작성</a:t>
+              <a:t>Vitest 셋업 + 우선 함수 테스트 작성 — 완료</a:t>
             </a:r>
             <a:endParaRPr lang="en-US" sz="1700" dirty="0"/>
           </a:p>
@@ -11041,7 +11602,7 @@
                 <a:ea typeface="Calibri" pitchFamily="34" charset="-122"/>
                 <a:cs typeface="Calibri" pitchFamily="34" charset="-120"/>
               </a:rPr>
-              <a:t>지금 바로 착수 가능 (DB 불필요)</a:t>
+              <a:t>38개 테스트(7개 파일) 전부 통과, 2026-07-28</a:t>
             </a:r>
             <a:endParaRPr lang="en-US" sz="1200" dirty="0"/>
           </a:p>
@@ -11139,7 +11700,7 @@
                 <a:ea typeface="Cambria" pitchFamily="34" charset="-122"/>
                 <a:cs typeface="Cambria" pitchFamily="34" charset="-120"/>
               </a:rPr>
-              <a:t>Supabase DB 연결</a:t>
+              <a:t>Supabase DB 연결 — 완료</a:t>
             </a:r>
             <a:endParaRPr lang="en-US" sz="1700" dirty="0"/>
           </a:p>
@@ -11178,7 +11739,7 @@
                 <a:ea typeface="Calibri" pitchFamily="34" charset="-122"/>
                 <a:cs typeface="Calibri" pitchFamily="34" charset="-120"/>
               </a:rPr>
-              <a:t>배포 검토 문서에서 결정한 인프라 준비 단계</a:t>
+              <a:t>프로젝트 생성 + 마이그레이션 8건 + 로컬 데이터 이전까지 완료, 2026-07-28</a:t>
             </a:r>
             <a:endParaRPr lang="en-US" sz="1200" dirty="0"/>
           </a:p>
@@ -11315,7 +11876,7 @@
                 <a:ea typeface="Calibri" pitchFamily="34" charset="-122"/>
                 <a:cs typeface="Calibri" pitchFamily="34" charset="-120"/>
               </a:rPr>
-              <a:t>OAuth 우회 방식 확정 필요</a:t>
+              <a:t>이제 착수 가능 — OAuth 우회 방식 확정 필요</a:t>
             </a:r>
             <a:endParaRPr lang="en-US" sz="1200" dirty="0"/>
           </a:p>

--- a/doc/ScoreCaddie_테스트계획서.pptx
+++ b/doc/ScoreCaddie_테스트계획서.pptx
@@ -4055,10 +4055,10 @@
                       <a:r>
                         <a:rPr lang="en-US" sz="1100" b="1" dirty="0">
                           <a:solidFill>
-                            <a:srgbClr val="0B5C63"/>
+                            <a:srgbClr val="0B8457"/>
                           </a:solidFill>
                         </a:rPr>
-                        <a:t>작성완료</a:t>
+                        <a:t>통과</a:t>
                       </a:r>
                       <a:endParaRPr lang="en-US" sz="1100" dirty="0"/>
                     </a:p>
@@ -4132,7 +4132,7 @@
                             <a:srgbClr val="17282A"/>
                           </a:solidFill>
                         </a:rPr>
-                        <a:t>샌드박스 네트워크 제한으로 실행 미검증(구현 완료)</a:t>
+                        <a:t>재홍님 로컬 npm run test:e2e로 확인</a:t>
                       </a:r>
                       <a:endParaRPr lang="en-US" sz="1100" dirty="0"/>
                     </a:p>
@@ -4242,10 +4242,10 @@
                       <a:r>
                         <a:rPr lang="en-US" sz="1100" b="1" dirty="0">
                           <a:solidFill>
-                            <a:srgbClr val="0B5C63"/>
+                            <a:srgbClr val="0B8457"/>
                           </a:solidFill>
                         </a:rPr>
-                        <a:t>작성완료</a:t>
+                        <a:t>통과</a:t>
                       </a:r>
                       <a:endParaRPr lang="en-US" sz="1100" dirty="0"/>
                     </a:p>
@@ -4319,7 +4319,7 @@
                             <a:srgbClr val="17282A"/>
                           </a:solidFill>
                         </a:rPr>
-                        <a:t>샌드박스 네트워크 제한으로 실행 미검증(구현 완료)</a:t>
+                        <a:t>재홍님 로컬 npm run test:e2e로 확인</a:t>
                       </a:r>
                       <a:endParaRPr lang="en-US" sz="1100" dirty="0"/>
                     </a:p>
@@ -4429,10 +4429,10 @@
                       <a:r>
                         <a:rPr lang="en-US" sz="1100" b="1" dirty="0">
                           <a:solidFill>
-                            <a:srgbClr val="0B5C63"/>
+                            <a:srgbClr val="0B8457"/>
                           </a:solidFill>
                         </a:rPr>
-                        <a:t>작성완료</a:t>
+                        <a:t>통과</a:t>
                       </a:r>
                       <a:endParaRPr lang="en-US" sz="1100" dirty="0"/>
                     </a:p>
@@ -4506,7 +4506,7 @@
                             <a:srgbClr val="17282A"/>
                           </a:solidFill>
                         </a:rPr>
-                        <a:t>샌드박스 네트워크 제한으로 실행 미검증(구현 완료)</a:t>
+                        <a:t>셀렉터 버그 2건 수정 후 통과(비고 참고)</a:t>
                       </a:r>
                       <a:endParaRPr lang="en-US" sz="1100" dirty="0"/>
                     </a:p>
@@ -4616,10 +4616,10 @@
                       <a:r>
                         <a:rPr lang="en-US" sz="1100" b="1" dirty="0">
                           <a:solidFill>
-                            <a:srgbClr val="0B5C63"/>
+                            <a:srgbClr val="0B8457"/>
                           </a:solidFill>
                         </a:rPr>
-                        <a:t>작성완료</a:t>
+                        <a:t>통과</a:t>
                       </a:r>
                       <a:endParaRPr lang="en-US" sz="1100" dirty="0"/>
                     </a:p>
@@ -4693,7 +4693,7 @@
                             <a:srgbClr val="17282A"/>
                           </a:solidFill>
                         </a:rPr>
-                        <a:t>샌드박스 네트워크 제한으로 실행 미검증(구현 완료)</a:t>
+                        <a:t>재홍님 로컬 npm run test:e2e로 확인</a:t>
                       </a:r>
                       <a:endParaRPr lang="en-US" sz="1100" dirty="0"/>
                     </a:p>

--- a/doc/ScoreCaddie_테스트계획서.pptx
+++ b/doc/ScoreCaddie_테스트계획서.pptx
@@ -16,9 +16,10 @@
     <p:sldId id="264" r:id="rId10"/>
     <p:sldId id="265" r:id="rId11"/>
     <p:sldId id="266" r:id="rId12"/>
+    <p:sldId id="267" r:id="rId13"/>
   </p:sldIdLst>
   <p:notesMasterIdLst>
-    <p:notesMasterId r:id="rId13"/>
+    <p:notesMasterId r:id="rId14"/>
   </p:notesMasterIdLst>
   <p:sldSz cx="12192000" cy="6858000"/>
   <p:notesSz cx="6858000" cy="12192000"/>
@@ -712,6 +713,94 @@
             <a:fld id="{F7021451-1387-4CA6-816F-3879F97B5CBC}" type="slidenum">
               <a:rPr lang="en-US"/>
               <a:t>11</a:t>
+            </a:fld>
+            <a:endParaRPr lang="en-US"/>
+          </a:p>
+        </p:txBody>
+      </p:sp>
+    </p:spTree>
+    <p:extLst>
+      <p:ext uri="{BB962C8B-B14F-4D97-AF65-F5344CB8AC3E}">
+        <p14:creationId xmlns:p14="http://schemas.microsoft.com/office/powerpoint/2010/main" val="1024086991"/>
+      </p:ext>
+    </p:extLst>
+  </p:cSld>
+  <p:clrMapOvr>
+    <a:masterClrMapping/>
+  </p:clrMapOvr>
+</p:notes>
+</file>
+
+<file path=ppt/notesSlides/notesSlide12.xml><?xml version="1.0" encoding="utf-8"?>
+<p:notes xmlns:a="http://schemas.openxmlformats.org/drawingml/2006/main" xmlns:r="http://schemas.openxmlformats.org/officeDocument/2006/relationships" xmlns:p="http://schemas.openxmlformats.org/presentationml/2006/main">
+  <p:cSld>
+    <p:spTree>
+      <p:nvGrpSpPr>
+        <p:cNvPr id="1" name=""/>
+        <p:cNvGrpSpPr/>
+        <p:nvPr/>
+      </p:nvGrpSpPr>
+      <p:grpSpPr>
+        <a:xfrm>
+          <a:off x="0" y="0"/>
+          <a:ext cx="0" cy="0"/>
+          <a:chOff x="0" y="0"/>
+          <a:chExt cx="0" cy="0"/>
+        </a:xfrm>
+      </p:grpSpPr>
+      <p:sp>
+        <p:nvSpPr>
+          <p:cNvPr id="2" name="Slide Image Placeholder 1"/>
+          <p:cNvSpPr>
+            <a:spLocks noGrp="1" noRot="1" noChangeAspect="1"/>
+          </p:cNvSpPr>
+          <p:nvPr>
+            <p:ph type="sldImg"/>
+          </p:nvPr>
+        </p:nvSpPr>
+        <p:spPr/>
+      </p:sp>
+      <p:sp>
+        <p:nvSpPr>
+          <p:cNvPr id="3" name="Notes Placeholder 2"/>
+          <p:cNvSpPr>
+            <a:spLocks noGrp="1"/>
+          </p:cNvSpPr>
+          <p:nvPr>
+            <p:ph type="body" idx="1"/>
+          </p:nvPr>
+        </p:nvSpPr>
+        <p:spPr/>
+        <p:txBody>
+          <a:bodyPr/>
+          <a:lstStyle/>
+          <a:p>
+            <a:r>
+              <a:rPr lang="en-US" dirty="0"/>
+              <a:t/>
+            </a:r>
+            <a:endParaRPr lang="en-US" dirty="0"/>
+          </a:p>
+        </p:txBody>
+      </p:sp>
+      <p:sp>
+        <p:nvSpPr>
+          <p:cNvPr id="4" name="Slide Number Placeholder 3"/>
+          <p:cNvSpPr>
+            <a:spLocks noGrp="1"/>
+          </p:cNvSpPr>
+          <p:nvPr>
+            <p:ph type="sldNum" sz="quarter" idx="10"/>
+          </p:nvPr>
+        </p:nvSpPr>
+        <p:spPr/>
+        <p:txBody>
+          <a:bodyPr/>
+          <a:lstStyle/>
+          <a:p>
+            <a:fld id="{F7021451-1387-4CA6-816F-3879F97B5CBC}" type="slidenum">
+              <a:rPr lang="en-US"/>
+              <a:t>12</a:t>
             </a:fld>
             <a:endParaRPr lang="en-US"/>
           </a:p>
@@ -5516,6 +5605,704 @@
 </p:sld>
 </file>
 
+<file path=ppt/slides/slide12.xml><?xml version="1.0" encoding="utf-8"?>
+<p:sld xmlns:a="http://schemas.openxmlformats.org/drawingml/2006/main" xmlns:r="http://schemas.openxmlformats.org/officeDocument/2006/relationships" xmlns:p="http://schemas.openxmlformats.org/presentationml/2006/main">
+  <p:cSld name="Slide 12">
+    <p:bg>
+      <p:bgPr>
+        <a:solidFill>
+          <a:srgbClr val="FFFFFF"/>
+        </a:solidFill>
+      </p:bgPr>
+    </p:bg>
+    <p:spTree>
+      <p:nvGrpSpPr>
+        <p:cNvPr id="1" name=""/>
+        <p:cNvGrpSpPr/>
+        <p:nvPr/>
+      </p:nvGrpSpPr>
+      <p:grpSpPr>
+        <a:xfrm>
+          <a:off x="0" y="0"/>
+          <a:ext cx="0" cy="0"/>
+          <a:chOff x="0" y="0"/>
+          <a:chExt cx="0" cy="0"/>
+        </a:xfrm>
+      </p:grpSpPr>
+      <p:sp>
+        <p:nvSpPr>
+          <p:cNvPr id="2" name="Text 0"/>
+          <p:cNvSpPr/>
+          <p:nvPr/>
+        </p:nvSpPr>
+        <p:spPr>
+          <a:xfrm>
+            <a:off x="548640" y="411480"/>
+            <a:ext cx="11064240" cy="640080"/>
+          </a:xfrm>
+          <a:prstGeom prst="rect">
+            <a:avLst/>
+          </a:prstGeom>
+          <a:noFill/>
+          <a:ln/>
+        </p:spPr>
+        <p:txBody>
+          <a:bodyPr wrap="square" lIns="0" tIns="0" rIns="0" bIns="0" rtlCol="0" anchor="ctr"/>
+          <a:lstStyle/>
+          <a:p>
+            <a:pPr indent="0" marL="0">
+              <a:buNone/>
+            </a:pPr>
+            <a:r>
+              <a:rPr lang="en-US" sz="3000" b="1" dirty="0">
+                <a:solidFill>
+                  <a:srgbClr val="17282A"/>
+                </a:solidFill>
+                <a:latin typeface="Cambria" pitchFamily="34" charset="0"/>
+                <a:ea typeface="Cambria" pitchFamily="34" charset="-122"/>
+                <a:cs typeface="Cambria" pitchFamily="34" charset="-120"/>
+              </a:rPr>
+              <a:t>버그 수정 이력 — Playwright</a:t>
+            </a:r>
+            <a:endParaRPr lang="en-US" sz="3000" dirty="0"/>
+          </a:p>
+        </p:txBody>
+      </p:sp>
+      <p:sp>
+        <p:nvSpPr>
+          <p:cNvPr id="3" name="Text 1"/>
+          <p:cNvSpPr/>
+          <p:nvPr/>
+        </p:nvSpPr>
+        <p:spPr>
+          <a:xfrm>
+            <a:off x="548640" y="1005840"/>
+            <a:ext cx="11064240" cy="365760"/>
+          </a:xfrm>
+          <a:prstGeom prst="rect">
+            <a:avLst/>
+          </a:prstGeom>
+          <a:noFill/>
+          <a:ln/>
+        </p:spPr>
+        <p:txBody>
+          <a:bodyPr wrap="square" lIns="0" tIns="0" rIns="0" bIns="0" rtlCol="0" anchor="ctr"/>
+          <a:lstStyle/>
+          <a:p>
+            <a:pPr indent="0" marL="0">
+              <a:buNone/>
+            </a:pPr>
+            <a:r>
+              <a:rPr lang="en-US" sz="1300" dirty="0">
+                <a:solidFill>
+                  <a:srgbClr val="5C7274"/>
+                </a:solidFill>
+                <a:latin typeface="Calibri" pitchFamily="34" charset="0"/>
+                <a:ea typeface="Calibri" pitchFamily="34" charset="-122"/>
+                <a:cs typeface="Calibri" pitchFamily="34" charset="-120"/>
+              </a:rPr>
+              <a:t>시나리오 1~4 로컬 실행 중 발견 · 수정된 항목</a:t>
+            </a:r>
+            <a:endParaRPr lang="en-US" sz="1300" dirty="0"/>
+          </a:p>
+        </p:txBody>
+      </p:sp>
+      <p:graphicFrame>
+        <p:nvGraphicFramePr>
+          <p:cNvPr id="13" name="Table 0"/>
+          <p:cNvGraphicFramePr>
+            <a:graphicFrameLocks noGrp="1"/>
+          </p:cNvGraphicFramePr>
+          <p:nvPr>
+            <p:extLst>
+              <p:ext uri="{D42A27DB-BD31-4B8C-83A1-F6EECF244321}">
+                <p14:modId xmlns:p14="http://schemas.microsoft.com/office/powerpoint/2010/main" val="1579011935"/>
+              </p:ext>
+            </p:extLst>
+          </p:nvPr>
+        </p:nvGraphicFramePr>
+        <p:xfrm>
+          <a:off x="548640" y="1783080"/>
+          <a:ext cx="11064240" cy="4206240"/>
+        </p:xfrm>
+        <a:graphic>
+          <a:graphicData uri="http://schemas.openxmlformats.org/drawingml/2006/table">
+            <a:tbl>
+              <a:tblPr/>
+              <a:tblGrid>
+                <a:gridCol w="2286000"/>
+                <a:gridCol w="2377440"/>
+                <a:gridCol w="3383280"/>
+                <a:gridCol w="3017520"/>
+              </a:tblGrid>
+              <a:tr h="1402080">
+                <a:tc>
+                  <a:txBody>
+                    <a:bodyPr/>
+                    <a:lstStyle/>
+                    <a:p>
+                      <a:pPr indent="0" marL="0">
+                        <a:buNone/>
+                      </a:pPr>
+                      <a:r>
+                        <a:rPr lang="en-US" sz="1200" b="1" dirty="0">
+                          <a:solidFill>
+                            <a:srgbClr val="FFFFFF"/>
+                          </a:solidFill>
+                        </a:rPr>
+                        <a:t>버그</a:t>
+                      </a:r>
+                      <a:endParaRPr lang="en-US" sz="1200" dirty="0"/>
+                    </a:p>
+                  </a:txBody>
+                  <a:tcPr marL="101600" marR="101600" marT="76200" marB="76200" anchor="t">
+                    <a:lnL w="0" cap="flat" cmpd="sng" algn="ctr">
+                      <a:noFill/>
+                    </a:lnL>
+                    <a:lnR w="0" cap="flat" cmpd="sng" algn="ctr">
+                      <a:noFill/>
+                    </a:lnR>
+                    <a:lnT w="0" cap="flat" cmpd="sng" algn="ctr">
+                      <a:noFill/>
+                    </a:lnT>
+                    <a:lnB w="0" cap="flat" cmpd="sng" algn="ctr">
+                      <a:noFill/>
+                    </a:lnB>
+                    <a:solidFill>
+                      <a:srgbClr val="028090"/>
+                    </a:solidFill>
+                  </a:tcPr>
+                </a:tc>
+                <a:tc>
+                  <a:txBody>
+                    <a:bodyPr/>
+                    <a:lstStyle/>
+                    <a:p>
+                      <a:pPr indent="0" marL="0">
+                        <a:buNone/>
+                      </a:pPr>
+                      <a:r>
+                        <a:rPr lang="en-US" sz="1200" b="1" dirty="0">
+                          <a:solidFill>
+                            <a:srgbClr val="FFFFFF"/>
+                          </a:solidFill>
+                        </a:rPr>
+                        <a:t>발견 파일</a:t>
+                      </a:r>
+                      <a:endParaRPr lang="en-US" sz="1200" dirty="0"/>
+                    </a:p>
+                  </a:txBody>
+                  <a:tcPr marL="101600" marR="101600" marT="76200" marB="76200" anchor="t">
+                    <a:lnL w="0" cap="flat" cmpd="sng" algn="ctr">
+                      <a:noFill/>
+                    </a:lnL>
+                    <a:lnR w="0" cap="flat" cmpd="sng" algn="ctr">
+                      <a:noFill/>
+                    </a:lnR>
+                    <a:lnT w="0" cap="flat" cmpd="sng" algn="ctr">
+                      <a:noFill/>
+                    </a:lnT>
+                    <a:lnB w="0" cap="flat" cmpd="sng" algn="ctr">
+                      <a:noFill/>
+                    </a:lnB>
+                    <a:solidFill>
+                      <a:srgbClr val="028090"/>
+                    </a:solidFill>
+                  </a:tcPr>
+                </a:tc>
+                <a:tc>
+                  <a:txBody>
+                    <a:bodyPr/>
+                    <a:lstStyle/>
+                    <a:p>
+                      <a:pPr indent="0" marL="0">
+                        <a:buNone/>
+                      </a:pPr>
+                      <a:r>
+                        <a:rPr lang="en-US" sz="1200" b="1" dirty="0">
+                          <a:solidFill>
+                            <a:srgbClr val="FFFFFF"/>
+                          </a:solidFill>
+                        </a:rPr>
+                        <a:t>원인</a:t>
+                      </a:r>
+                      <a:endParaRPr lang="en-US" sz="1200" dirty="0"/>
+                    </a:p>
+                  </a:txBody>
+                  <a:tcPr marL="101600" marR="101600" marT="76200" marB="76200" anchor="t">
+                    <a:lnL w="0" cap="flat" cmpd="sng" algn="ctr">
+                      <a:noFill/>
+                    </a:lnL>
+                    <a:lnR w="0" cap="flat" cmpd="sng" algn="ctr">
+                      <a:noFill/>
+                    </a:lnR>
+                    <a:lnT w="0" cap="flat" cmpd="sng" algn="ctr">
+                      <a:noFill/>
+                    </a:lnT>
+                    <a:lnB w="0" cap="flat" cmpd="sng" algn="ctr">
+                      <a:noFill/>
+                    </a:lnB>
+                    <a:solidFill>
+                      <a:srgbClr val="028090"/>
+                    </a:solidFill>
+                  </a:tcPr>
+                </a:tc>
+                <a:tc>
+                  <a:txBody>
+                    <a:bodyPr/>
+                    <a:lstStyle/>
+                    <a:p>
+                      <a:pPr indent="0" marL="0">
+                        <a:buNone/>
+                      </a:pPr>
+                      <a:r>
+                        <a:rPr lang="en-US" sz="1200" b="1" dirty="0">
+                          <a:solidFill>
+                            <a:srgbClr val="FFFFFF"/>
+                          </a:solidFill>
+                        </a:rPr>
+                        <a:t>수정</a:t>
+                      </a:r>
+                      <a:endParaRPr lang="en-US" sz="1200" dirty="0"/>
+                    </a:p>
+                  </a:txBody>
+                  <a:tcPr marL="101600" marR="101600" marT="76200" marB="76200" anchor="t">
+                    <a:lnL w="0" cap="flat" cmpd="sng" algn="ctr">
+                      <a:noFill/>
+                    </a:lnL>
+                    <a:lnR w="0" cap="flat" cmpd="sng" algn="ctr">
+                      <a:noFill/>
+                    </a:lnR>
+                    <a:lnT w="0" cap="flat" cmpd="sng" algn="ctr">
+                      <a:noFill/>
+                    </a:lnT>
+                    <a:lnB w="0" cap="flat" cmpd="sng" algn="ctr">
+                      <a:noFill/>
+                    </a:lnB>
+                    <a:solidFill>
+                      <a:srgbClr val="028090"/>
+                    </a:solidFill>
+                  </a:tcPr>
+                </a:tc>
+              </a:tr>
+              <a:tr h="1402080">
+                <a:tc>
+                  <a:txBody>
+                    <a:bodyPr/>
+                    <a:lstStyle/>
+                    <a:p>
+                      <a:pPr indent="0" marL="0">
+                        <a:buNone/>
+                      </a:pPr>
+                      <a:r>
+                        <a:rPr lang="en-US" sz="1100" dirty="0">
+                          <a:solidFill>
+                            <a:srgbClr val="17282A"/>
+                          </a:solidFill>
+                        </a:rPr>
+                        <a:t>"골프장" 선택 시 30초 타임아웃</a:t>
+                      </a:r>
+                      <a:endParaRPr lang="en-US" sz="1100" dirty="0"/>
+                    </a:p>
+                  </a:txBody>
+                  <a:tcPr marL="101600" marR="101600" marT="76200" marB="76200" anchor="t">
+                    <a:lnL w="0" cap="flat" cmpd="sng" algn="ctr">
+                      <a:noFill/>
+                    </a:lnL>
+                    <a:lnR w="0" cap="flat" cmpd="sng" algn="ctr">
+                      <a:noFill/>
+                    </a:lnR>
+                    <a:lnT w="0" cap="flat" cmpd="sng" algn="ctr">
+                      <a:noFill/>
+                    </a:lnT>
+                    <a:lnB w="0" cap="flat" cmpd="sng" algn="ctr">
+                      <a:noFill/>
+                    </a:lnB>
+                    <a:solidFill>
+                      <a:srgbClr val="FFFFFF"/>
+                    </a:solidFill>
+                  </a:tcPr>
+                </a:tc>
+                <a:tc>
+                  <a:txBody>
+                    <a:bodyPr/>
+                    <a:lstStyle/>
+                    <a:p>
+                      <a:pPr indent="0" marL="0">
+                        <a:buNone/>
+                      </a:pPr>
+                      <a:r>
+                        <a:rPr lang="en-US" sz="1100" dirty="0">
+                          <a:solidFill>
+                            <a:srgbClr val="17282A"/>
+                          </a:solidFill>
+                        </a:rPr>
+                        <a:t>src/components/RoundStep1.tsx</a:t>
+                      </a:r>
+                      <a:endParaRPr lang="en-US" sz="1100" dirty="0"/>
+                    </a:p>
+                    <a:p>
+                      <a:pPr indent="0" marL="0">
+                        <a:buNone/>
+                      </a:pPr>
+                      <a:r>
+                        <a:rPr lang="en-US" sz="1100" dirty="0">
+                          <a:solidFill>
+                            <a:srgbClr val="17282A"/>
+                          </a:solidFill>
+                        </a:rPr>
+                        <a:t>(e2e/rounds-new.spec.ts)</a:t>
+                      </a:r>
+                      <a:endParaRPr lang="en-US" sz="1100" dirty="0"/>
+                    </a:p>
+                  </a:txBody>
+                  <a:tcPr marL="101600" marR="101600" marT="76200" marB="76200" anchor="t">
+                    <a:lnL w="0" cap="flat" cmpd="sng" algn="ctr">
+                      <a:noFill/>
+                    </a:lnL>
+                    <a:lnR w="0" cap="flat" cmpd="sng" algn="ctr">
+                      <a:noFill/>
+                    </a:lnR>
+                    <a:lnT w="0" cap="flat" cmpd="sng" algn="ctr">
+                      <a:noFill/>
+                    </a:lnT>
+                    <a:lnB w="0" cap="flat" cmpd="sng" algn="ctr">
+                      <a:noFill/>
+                    </a:lnB>
+                    <a:solidFill>
+                      <a:srgbClr val="FFFFFF"/>
+                    </a:solidFill>
+                  </a:tcPr>
+                </a:tc>
+                <a:tc>
+                  <a:txBody>
+                    <a:bodyPr/>
+                    <a:lstStyle/>
+                    <a:p>
+                      <a:pPr indent="0" marL="0">
+                        <a:buNone/>
+                      </a:pPr>
+                      <a:r>
+                        <a:rPr lang="en-US" sz="1100" dirty="0">
+                          <a:solidFill>
+                            <a:srgbClr val="17282A"/>
+                          </a:solidFill>
+                        </a:rPr>
+                        <a:t>select와 label이 htmlFor/id로 연결돼 있지 않아 getByLabel("골프장")이 요소를 찾지 못함</a:t>
+                      </a:r>
+                      <a:endParaRPr lang="en-US" sz="1100" dirty="0"/>
+                    </a:p>
+                  </a:txBody>
+                  <a:tcPr marL="101600" marR="101600" marT="76200" marB="76200" anchor="t">
+                    <a:lnL w="0" cap="flat" cmpd="sng" algn="ctr">
+                      <a:noFill/>
+                    </a:lnL>
+                    <a:lnR w="0" cap="flat" cmpd="sng" algn="ctr">
+                      <a:noFill/>
+                    </a:lnR>
+                    <a:lnT w="0" cap="flat" cmpd="sng" algn="ctr">
+                      <a:noFill/>
+                    </a:lnT>
+                    <a:lnB w="0" cap="flat" cmpd="sng" algn="ctr">
+                      <a:noFill/>
+                    </a:lnB>
+                    <a:solidFill>
+                      <a:srgbClr val="FFFFFF"/>
+                    </a:solidFill>
+                  </a:tcPr>
+                </a:tc>
+                <a:tc>
+                  <a:txBody>
+                    <a:bodyPr/>
+                    <a:lstStyle/>
+                    <a:p>
+                      <a:pPr indent="0" marL="0">
+                        <a:buNone/>
+                      </a:pPr>
+                      <a:r>
+                        <a:rPr lang="en-US" sz="1100" dirty="0">
+                          <a:solidFill>
+                            <a:srgbClr val="17282A"/>
+                          </a:solidFill>
+                        </a:rPr>
+                        <a:t>id="round-course"로 label-select 명시적 연결 (접근성 개선 겸함)</a:t>
+                      </a:r>
+                      <a:endParaRPr lang="en-US" sz="1100" dirty="0"/>
+                    </a:p>
+                  </a:txBody>
+                  <a:tcPr marL="101600" marR="101600" marT="76200" marB="76200" anchor="t">
+                    <a:lnL w="0" cap="flat" cmpd="sng" algn="ctr">
+                      <a:noFill/>
+                    </a:lnL>
+                    <a:lnR w="0" cap="flat" cmpd="sng" algn="ctr">
+                      <a:noFill/>
+                    </a:lnR>
+                    <a:lnT w="0" cap="flat" cmpd="sng" algn="ctr">
+                      <a:noFill/>
+                    </a:lnT>
+                    <a:lnB w="0" cap="flat" cmpd="sng" algn="ctr">
+                      <a:noFill/>
+                    </a:lnB>
+                    <a:solidFill>
+                      <a:srgbClr val="FFFFFF"/>
+                    </a:solidFill>
+                  </a:tcPr>
+                </a:tc>
+              </a:tr>
+              <a:tr h="1402080">
+                <a:tc>
+                  <a:txBody>
+                    <a:bodyPr/>
+                    <a:lstStyle/>
+                    <a:p>
+                      <a:pPr indent="0" marL="0">
+                        <a:buNone/>
+                      </a:pPr>
+                      <a:r>
+                        <a:rPr lang="en-US" sz="1100" dirty="0">
+                          <a:solidFill>
+                            <a:srgbClr val="17282A"/>
+                          </a:solidFill>
+                        </a:rPr>
+                        <a:t>/rounds 목록 확인 단계 실패</a:t>
+                      </a:r>
+                      <a:endParaRPr lang="en-US" sz="1100" dirty="0"/>
+                    </a:p>
+                    <a:p>
+                      <a:pPr indent="0" marL="0">
+                        <a:buNone/>
+                      </a:pPr>
+                      <a:r>
+                        <a:rPr lang="en-US" sz="1100" dirty="0">
+                          <a:solidFill>
+                            <a:srgbClr val="17282A"/>
+                          </a:solidFill>
+                        </a:rPr>
+                        <a:t>(strict violation → hidden)</a:t>
+                      </a:r>
+                      <a:endParaRPr lang="en-US" sz="1100" dirty="0"/>
+                    </a:p>
+                  </a:txBody>
+                  <a:tcPr marL="101600" marR="101600" marT="76200" marB="76200" anchor="t">
+                    <a:lnL w="0" cap="flat" cmpd="sng" algn="ctr">
+                      <a:noFill/>
+                    </a:lnL>
+                    <a:lnR w="0" cap="flat" cmpd="sng" algn="ctr">
+                      <a:noFill/>
+                    </a:lnR>
+                    <a:lnT w="0" cap="flat" cmpd="sng" algn="ctr">
+                      <a:noFill/>
+                    </a:lnT>
+                    <a:lnB w="0" cap="flat" cmpd="sng" algn="ctr">
+                      <a:noFill/>
+                    </a:lnB>
+                    <a:solidFill>
+                      <a:srgbClr val="F2F7F7"/>
+                    </a:solidFill>
+                  </a:tcPr>
+                </a:tc>
+                <a:tc>
+                  <a:txBody>
+                    <a:bodyPr/>
+                    <a:lstStyle/>
+                    <a:p>
+                      <a:pPr indent="0" marL="0">
+                        <a:buNone/>
+                      </a:pPr>
+                      <a:r>
+                        <a:rPr lang="en-US" sz="1100" dirty="0">
+                          <a:solidFill>
+                            <a:srgbClr val="17282A"/>
+                          </a:solidFill>
+                        </a:rPr>
+                        <a:t>e2e/rounds-new.spec.ts</a:t>
+                      </a:r>
+                      <a:endParaRPr lang="en-US" sz="1100" dirty="0"/>
+                    </a:p>
+                  </a:txBody>
+                  <a:tcPr marL="101600" marR="101600" marT="76200" marB="76200" anchor="t">
+                    <a:lnL w="0" cap="flat" cmpd="sng" algn="ctr">
+                      <a:noFill/>
+                    </a:lnL>
+                    <a:lnR w="0" cap="flat" cmpd="sng" algn="ctr">
+                      <a:noFill/>
+                    </a:lnR>
+                    <a:lnT w="0" cap="flat" cmpd="sng" algn="ctr">
+                      <a:noFill/>
+                    </a:lnT>
+                    <a:lnB w="0" cap="flat" cmpd="sng" algn="ctr">
+                      <a:noFill/>
+                    </a:lnB>
+                    <a:solidFill>
+                      <a:srgbClr val="F2F7F7"/>
+                    </a:solidFill>
+                  </a:tcPr>
+                </a:tc>
+                <a:tc>
+                  <a:txBody>
+                    <a:bodyPr/>
+                    <a:lstStyle/>
+                    <a:p>
+                      <a:pPr indent="0" marL="0">
+                        <a:buNone/>
+                      </a:pPr>
+                      <a:r>
+                        <a:rPr lang="en-US" sz="1100" dirty="0">
+                          <a:solidFill>
+                            <a:srgbClr val="17282A"/>
+                          </a:solidFill>
+                        </a:rPr>
+                        <a:t>getByText(course.name)이 필터용 &lt;select&gt;&lt;option&gt;(hidden)까지 함께 매칭</a:t>
+                      </a:r>
+                      <a:endParaRPr lang="en-US" sz="1100" dirty="0"/>
+                    </a:p>
+                  </a:txBody>
+                  <a:tcPr marL="101600" marR="101600" marT="76200" marB="76200" anchor="t">
+                    <a:lnL w="0" cap="flat" cmpd="sng" algn="ctr">
+                      <a:noFill/>
+                    </a:lnL>
+                    <a:lnR w="0" cap="flat" cmpd="sng" algn="ctr">
+                      <a:noFill/>
+                    </a:lnR>
+                    <a:lnT w="0" cap="flat" cmpd="sng" algn="ctr">
+                      <a:noFill/>
+                    </a:lnT>
+                    <a:lnB w="0" cap="flat" cmpd="sng" algn="ctr">
+                      <a:noFill/>
+                    </a:lnB>
+                    <a:solidFill>
+                      <a:srgbClr val="F2F7F7"/>
+                    </a:solidFill>
+                  </a:tcPr>
+                </a:tc>
+                <a:tc>
+                  <a:txBody>
+                    <a:bodyPr/>
+                    <a:lstStyle/>
+                    <a:p>
+                      <a:pPr indent="0" marL="0">
+                        <a:buNone/>
+                      </a:pPr>
+                      <a:r>
+                        <a:rPr lang="en-US" sz="1100" dirty="0">
+                          <a:solidFill>
+                            <a:srgbClr val="17282A"/>
+                          </a:solidFill>
+                        </a:rPr>
+                        <a:t>실제 라운드 카드 링크(RoundListItem)로 좁힘: getByRole("link", { name })</a:t>
+                      </a:r>
+                      <a:endParaRPr lang="en-US" sz="1100" dirty="0"/>
+                    </a:p>
+                  </a:txBody>
+                  <a:tcPr marL="101600" marR="101600" marT="76200" marB="76200" anchor="t">
+                    <a:lnL w="0" cap="flat" cmpd="sng" algn="ctr">
+                      <a:noFill/>
+                    </a:lnL>
+                    <a:lnR w="0" cap="flat" cmpd="sng" algn="ctr">
+                      <a:noFill/>
+                    </a:lnR>
+                    <a:lnT w="0" cap="flat" cmpd="sng" algn="ctr">
+                      <a:noFill/>
+                    </a:lnT>
+                    <a:lnB w="0" cap="flat" cmpd="sng" algn="ctr">
+                      <a:noFill/>
+                    </a:lnB>
+                    <a:solidFill>
+                      <a:srgbClr val="F2F7F7"/>
+                    </a:solidFill>
+                  </a:tcPr>
+                </a:tc>
+              </a:tr>
+            </a:tbl>
+          </a:graphicData>
+        </a:graphic>
+      </p:graphicFrame>
+      <p:sp>
+        <p:nvSpPr>
+          <p:cNvPr id="5" name="Text 2"/>
+          <p:cNvSpPr/>
+          <p:nvPr/>
+        </p:nvSpPr>
+        <p:spPr>
+          <a:xfrm>
+            <a:off x="548640" y="6108192"/>
+            <a:ext cx="11064240" cy="365760"/>
+          </a:xfrm>
+          <a:prstGeom prst="rect">
+            <a:avLst/>
+          </a:prstGeom>
+          <a:noFill/>
+          <a:ln/>
+        </p:spPr>
+        <p:txBody>
+          <a:bodyPr wrap="square" lIns="0" tIns="0" rIns="0" bIns="0" rtlCol="0" anchor="ctr"/>
+          <a:lstStyle/>
+          <a:p>
+            <a:pPr indent="0" marL="0">
+              <a:buNone/>
+            </a:pPr>
+            <a:r>
+              <a:rPr lang="en-US" sz="1100" i="1" dirty="0">
+                <a:solidFill>
+                  <a:srgbClr val="5C7274"/>
+                </a:solidFill>
+                <a:latin typeface="Calibri" pitchFamily="34" charset="0"/>
+                <a:ea typeface="Calibri" pitchFamily="34" charset="-122"/>
+                <a:cs typeface="Calibri" pitchFamily="34" charset="-120"/>
+              </a:rPr>
+              <a:t>※ 두 건 모두 앱 동작 자체의 결함이 아니라 (1) 접근성 마크업 누락, (2) 테스트 셀렉터의 범위가 지나치게 넓었던 문제였습니다. 수정 후 재실행하여 시나리오 1~4 전부 통과를 확인했습니다.</a:t>
+            </a:r>
+            <a:endParaRPr lang="en-US" sz="1100" dirty="0"/>
+          </a:p>
+        </p:txBody>
+      </p:sp>
+      <p:sp>
+        <p:nvSpPr>
+          <p:cNvPr id="6" name="Text 3"/>
+          <p:cNvSpPr/>
+          <p:nvPr/>
+        </p:nvSpPr>
+        <p:spPr>
+          <a:xfrm>
+            <a:off x="457200" y="6510528"/>
+            <a:ext cx="7315200" cy="274320"/>
+          </a:xfrm>
+          <a:prstGeom prst="rect">
+            <a:avLst/>
+          </a:prstGeom>
+          <a:noFill/>
+          <a:ln/>
+        </p:spPr>
+        <p:txBody>
+          <a:bodyPr wrap="square" lIns="0" tIns="0" rIns="0" bIns="0" rtlCol="0" anchor="ctr"/>
+          <a:lstStyle/>
+          <a:p>
+            <a:pPr indent="0" marL="0">
+              <a:buNone/>
+            </a:pPr>
+            <a:r>
+              <a:rPr lang="en-US" sz="1000" dirty="0">
+                <a:solidFill>
+                  <a:srgbClr val="5C7274"/>
+                </a:solidFill>
+                <a:latin typeface="Calibri" pitchFamily="34" charset="0"/>
+                <a:ea typeface="Calibri" pitchFamily="34" charset="-122"/>
+                <a:cs typeface="Calibri" pitchFamily="34" charset="-120"/>
+              </a:rPr>
+              <a:t>ScoreCaddie 테스트 계획서  ·  05 테스트 결과 관리</a:t>
+            </a:r>
+            <a:endParaRPr lang="en-US" sz="1000" dirty="0"/>
+          </a:p>
+        </p:txBody>
+      </p:sp>
+    </p:spTree>
+  </p:cSld>
+  <p:clrMapOvr>
+    <a:masterClrMapping/>
+  </p:clrMapOvr>
+</p:sld>
+</file>
+
 <file path=ppt/slides/slide2.xml><?xml version="1.0" encoding="utf-8"?>
 <p:sld xmlns:a="http://schemas.openxmlformats.org/drawingml/2006/main" xmlns:r="http://schemas.openxmlformats.org/officeDocument/2006/relationships" xmlns:p="http://schemas.openxmlformats.org/presentationml/2006/main">
   <p:cSld name="Slide 2">

--- a/doc/ScoreCaddie_테스트계획서.pptx
+++ b/doc/ScoreCaddie_테스트계획서.pptx
@@ -4892,10 +4892,10 @@
                       <a:r>
                         <a:rPr lang="en-US" sz="1100" b="1" dirty="0">
                           <a:solidFill>
-                            <a:srgbClr val="8A9A9C"/>
+                            <a:srgbClr val="0B8457"/>
                           </a:solidFill>
                         </a:rPr>
-                        <a:t>예정</a:t>
+                        <a:t>통과</a:t>
                       </a:r>
                       <a:endParaRPr lang="en-US" sz="1100" dirty="0"/>
                     </a:p>
@@ -4932,7 +4932,7 @@
                             <a:srgbClr val="17282A"/>
                           </a:solidFill>
                         </a:rPr>
-                        <a:t>-</a:t>
+                        <a:t>2026-07-29</a:t>
                       </a:r>
                       <a:endParaRPr lang="en-US" sz="1100" dirty="0"/>
                     </a:p>
@@ -4969,7 +4969,7 @@
                             <a:srgbClr val="17282A"/>
                           </a:solidFill>
                         </a:rPr>
-                        <a:t>관리자 role 세팅 필요</a:t>
+                        <a:t>ADMIN 계정+전용 테스트 골프장, label 누락 수정</a:t>
                       </a:r>
                       <a:endParaRPr lang="en-US" sz="1100" dirty="0"/>
                     </a:p>
@@ -5079,10 +5079,10 @@
                       <a:r>
                         <a:rPr lang="en-US" sz="1100" b="1" dirty="0">
                           <a:solidFill>
-                            <a:srgbClr val="8A9A9C"/>
+                            <a:srgbClr val="0B8457"/>
                           </a:solidFill>
                         </a:rPr>
-                        <a:t>예정</a:t>
+                        <a:t>통과</a:t>
                       </a:r>
                       <a:endParaRPr lang="en-US" sz="1100" dirty="0"/>
                     </a:p>
@@ -5119,7 +5119,7 @@
                             <a:srgbClr val="17282A"/>
                           </a:solidFill>
                         </a:rPr>
-                        <a:t>-</a:t>
+                        <a:t>2026-07-29</a:t>
                       </a:r>
                       <a:endParaRPr lang="en-US" sz="1100" dirty="0"/>
                     </a:p>
@@ -5156,7 +5156,7 @@
                             <a:srgbClr val="17282A"/>
                           </a:solidFill>
                         </a:rPr>
-                        <a:t>관리자 role 세팅 필요</a:t>
+                        <a:t>외부 API 없음 — 즉석 CSV로 부분성공 검증</a:t>
                       </a:r>
                       <a:endParaRPr lang="en-US" sz="1100" dirty="0"/>
                     </a:p>
@@ -5266,10 +5266,10 @@
                       <a:r>
                         <a:rPr lang="en-US" sz="1100" b="1" dirty="0">
                           <a:solidFill>
-                            <a:srgbClr val="8A9A9C"/>
+                            <a:srgbClr val="0B8457"/>
                           </a:solidFill>
                         </a:rPr>
-                        <a:t>예정</a:t>
+                        <a:t>통과</a:t>
                       </a:r>
                       <a:endParaRPr lang="en-US" sz="1100" dirty="0"/>
                     </a:p>
@@ -5306,7 +5306,7 @@
                             <a:srgbClr val="17282A"/>
                           </a:solidFill>
                         </a:rPr>
-                        <a:t>-</a:t>
+                        <a:t>2026-07-29</a:t>
                       </a:r>
                       <a:endParaRPr lang="en-US" sz="1100" dirty="0"/>
                     </a:p>
@@ -5343,7 +5343,7 @@
                             <a:srgbClr val="17282A"/>
                           </a:solidFill>
                         </a:rPr>
-                        <a:t>외부 API 목 서버 권장</a:t>
+                        <a:t>로컬 목 서버로 공공데이터 API 대체</a:t>
                       </a:r>
                       <a:endParaRPr lang="en-US" sz="1100" dirty="0"/>
                     </a:p>
@@ -5453,10 +5453,10 @@
                       <a:r>
                         <a:rPr lang="en-US" sz="1100" b="1" dirty="0">
                           <a:solidFill>
-                            <a:srgbClr val="8A9A9C"/>
+                            <a:srgbClr val="0B8457"/>
                           </a:solidFill>
                         </a:rPr>
-                        <a:t>예정</a:t>
+                        <a:t>통과</a:t>
                       </a:r>
                       <a:endParaRPr lang="en-US" sz="1100" dirty="0"/>
                     </a:p>
@@ -5493,7 +5493,7 @@
                             <a:srgbClr val="17282A"/>
                           </a:solidFill>
                         </a:rPr>
-                        <a:t>-</a:t>
+                        <a:t>2026-07-29</a:t>
                       </a:r>
                       <a:endParaRPr lang="en-US" sz="1100" dirty="0"/>
                     </a:p>
@@ -5530,7 +5530,7 @@
                             <a:srgbClr val="17282A"/>
                           </a:solidFill>
                         </a:rPr>
-                        <a:t>카카오 API 목 처리 권장</a:t>
+                        <a:t>로컬 목 서버로 카카오 API 대체, 실 데이터 안전 격리</a:t>
                       </a:r>
                       <a:endParaRPr lang="en-US" sz="1100" dirty="0"/>
                     </a:p>
@@ -10416,7 +10416,7 @@
                 <a:ea typeface="Calibri" pitchFamily="34" charset="-122"/>
                 <a:cs typeface="Calibri" pitchFamily="34" charset="-120"/>
               </a:rPr>
-              <a:t>Supabase DB 연결 완료(2026-07-28) — 이제 착수 가능</a:t>
+              <a:t>Supabase DB 연결 완료 + 8개 시나리오 전부 재홍님 로컬에서 실행 검증 완료(2026-07-29)</a:t>
             </a:r>
             <a:endParaRPr lang="en-US" sz="1250" dirty="0"/>
           </a:p>
@@ -10538,7 +10538,7 @@
                 <a:ea typeface="Calibri" pitchFamily="34" charset="-122"/>
                 <a:cs typeface="Calibri" pitchFamily="34" charset="-120"/>
               </a:rPr>
-              <a:t>Google/Kakao 실제 OAuth 화면은 자동화 어려움 → 테스트 전용 로그인 경로 또는 세션 쿠키 주입 방식 검토</a:t>
+              <a:t>앱이 이미 id/pw(Credentials) 로그인을 지원해 별도 우회 불필요 — 테스트 전용 계정으로 실제 로그인 폼을 그대로 통과(OAuth는 안 씀)</a:t>
             </a:r>
             <a:endParaRPr lang="en-US" sz="1250" dirty="0"/>
           </a:p>
@@ -10660,7 +10660,7 @@
                 <a:ea typeface="Calibri" pitchFamily="34" charset="-122"/>
                 <a:cs typeface="Calibri" pitchFamily="34" charset="-120"/>
               </a:rPr>
-              <a:t>운영 DB 오염 방지를 위해 테스트 전용 Supabase 프로젝트/스키마 분리 권장</a:t>
+              <a:t>별도 Supabase 프로젝트 분리 대신, 이름 접두사(E2E_TEST_)/전용 계정으로 같은 DB 안에서 격리 — global-setup/teardown이 생성·삭제, 실 데이터(652건)는 전혀 건드리지 않음</a:t>
             </a:r>
             <a:endParaRPr lang="en-US" sz="1250" dirty="0"/>
           </a:p>
@@ -10968,7 +10968,7 @@
                 <a:ea typeface="Calibri" pitchFamily="34" charset="-122"/>
                 <a:cs typeface="Calibri" pitchFamily="34" charset="-120"/>
               </a:rPr>
-              <a:t>테스트 전용 로그인 경로 필요</a:t>
+              <a:t>id/pw 테스트 계정으로 실제 로그인 폼 통과</a:t>
             </a:r>
             <a:endParaRPr lang="en-US" sz="1050" dirty="0"/>
           </a:p>
@@ -11604,7 +11604,7 @@
                 <a:ea typeface="Calibri" pitchFamily="34" charset="-122"/>
                 <a:cs typeface="Calibri" pitchFamily="34" charset="-120"/>
               </a:rPr>
-              <a:t>CRUD 전반</a:t>
+              <a:t>ADMIN 전용 계정 + 전용 테스트 골프장으로 CRUD 전반</a:t>
             </a:r>
             <a:endParaRPr lang="en-US" sz="1050" dirty="0"/>
           </a:p>
@@ -11763,7 +11763,7 @@
                 <a:ea typeface="Calibri" pitchFamily="34" charset="-122"/>
                 <a:cs typeface="Calibri" pitchFamily="34" charset="-120"/>
               </a:rPr>
-              <a:t>부분 성공 처리 확인</a:t>
+              <a:t>부분 성공 처리 확인(외부 API 불필요)</a:t>
             </a:r>
             <a:endParaRPr lang="en-US" sz="1050" dirty="0"/>
           </a:p>
@@ -11922,7 +11922,7 @@
                 <a:ea typeface="Calibri" pitchFamily="34" charset="-122"/>
                 <a:cs typeface="Calibri" pitchFamily="34" charset="-120"/>
               </a:rPr>
-              <a:t>외부 API 응답은 별도 목 서버 권장</a:t>
+              <a:t>로컬 목 서버로 외부 API 대체</a:t>
             </a:r>
             <a:endParaRPr lang="en-US" sz="1050" dirty="0"/>
           </a:p>
@@ -12081,7 +12081,7 @@
                 <a:ea typeface="Calibri" pitchFamily="34" charset="-122"/>
                 <a:cs typeface="Calibri" pitchFamily="34" charset="-120"/>
               </a:rPr>
-              <a:t>카카오 API도 목 처리 권장</a:t>
+              <a:t>로컬 목 서버로 카카오 API 대체, 실 데이터 안전 격리</a:t>
             </a:r>
             <a:endParaRPr lang="en-US" sz="1050" dirty="0"/>
           </a:p>
@@ -12252,7 +12252,7 @@
                 <a:ea typeface="Calibri" pitchFamily="34" charset="-122"/>
                 <a:cs typeface="Calibri" pitchFamily="34" charset="-120"/>
               </a:rPr>
-              <a:t>Vitest는 지금, Playwright는 Supabase 연결 이후</a:t>
+              <a:t>Vitest, Supabase 연결, Playwright 8개 시나리오까지 전부 완료</a:t>
             </a:r>
             <a:endParaRPr lang="en-US" sz="1300" dirty="0"/>
           </a:p>
@@ -12624,7 +12624,7 @@
                 <a:ea typeface="Cambria" pitchFamily="34" charset="-122"/>
                 <a:cs typeface="Cambria" pitchFamily="34" charset="-120"/>
               </a:rPr>
-              <a:t>Playwright 셋업 + 테스트 전용 로그인 경로 마련</a:t>
+              <a:t>Playwright 셋업 — 완료</a:t>
             </a:r>
             <a:endParaRPr lang="en-US" sz="1700" dirty="0"/>
           </a:p>
@@ -12663,7 +12663,7 @@
                 <a:ea typeface="Calibri" pitchFamily="34" charset="-122"/>
                 <a:cs typeface="Calibri" pitchFamily="34" charset="-120"/>
               </a:rPr>
-              <a:t>이제 착수 가능 — OAuth 우회 방식 확정 필요</a:t>
+              <a:t>id/pw 테스트 계정 + storageState 재사용 구조, OAuth 우회 불필요로 판명</a:t>
             </a:r>
             <a:endParaRPr lang="en-US" sz="1200" dirty="0"/>
           </a:p>
@@ -12761,7 +12761,7 @@
                 <a:ea typeface="Cambria" pitchFamily="34" charset="-122"/>
                 <a:cs typeface="Cambria" pitchFamily="34" charset="-120"/>
               </a:rPr>
-              <a:t>핵심 사용자 플로우 e2e 작성 · 실행</a:t>
+              <a:t>8개 시나리오 e2e 작성 · 실행 — 완료</a:t>
             </a:r>
             <a:endParaRPr lang="en-US" sz="1700" dirty="0"/>
           </a:p>
@@ -12800,7 +12800,7 @@
                 <a:ea typeface="Calibri" pitchFamily="34" charset="-122"/>
                 <a:cs typeface="Calibri" pitchFamily="34" charset="-120"/>
               </a:rPr>
-              <a:t>라운드 등록 2-Step부터 우선 작성</a:t>
+              <a:t>1~4번(핵심 플로우) + 5~8번(관리자, 목 서버로 외부 API 대체) 전부 통과, 2026-07-29</a:t>
             </a:r>
             <a:endParaRPr lang="en-US" sz="1200" dirty="0"/>
           </a:p>
